--- a/docs/新システム移行説明会_rev2.pptx
+++ b/docs/新システム移行説明会_rev2.pptx
@@ -3478,7 +3478,7 @@
                 <a:ea typeface="Meiryo" pitchFamily="34" charset="-122"/>
                 <a:cs typeface="Meiryo" pitchFamily="34" charset="-120"/>
               </a:rPr>
-              <a:t>アラート — どんな時に出る？</a:t>
+              <a:t>アラート — どんな時に、何色で出る？</a:t>
             </a:r>
             <a:endParaRPr lang="en-US" sz="2900" dirty="0"/>
           </a:p>
@@ -3492,12 +3492,78 @@
         </p:nvSpPr>
         <p:spPr>
           <a:xfrm>
-            <a:off x="640080" y="1691640"/>
-            <a:ext cx="2743200" cy="868680"/>
+            <a:off x="640080" y="1371600"/>
+            <a:ext cx="11155680" cy="320040"/>
+          </a:xfrm>
+          <a:prstGeom prst="rect">
+            <a:avLst/>
+          </a:prstGeom>
+          <a:noFill/>
+          <a:ln/>
+        </p:spPr>
+        <p:txBody>
+          <a:bodyPr wrap="square" lIns="0" tIns="0" rIns="0" bIns="0" rtlCol="0" anchor="ctr"/>
+          <a:lstStyle/>
+          <a:p>
+            <a:pPr indent="0" marL="0">
+              <a:buNone/>
+            </a:pPr>
+            <a:r>
+              <a:rPr lang="en-US" sz="1300" dirty="0">
+                <a:solidFill>
+                  <a:srgbClr val="6B7280"/>
+                </a:solidFill>
+                <a:latin typeface="Meiryo" pitchFamily="34" charset="0"/>
+                <a:ea typeface="Meiryo" pitchFamily="34" charset="-122"/>
+                <a:cs typeface="Meiryo" pitchFamily="34" charset="-120"/>
+              </a:rPr>
+              <a:t>マイページ上部の2つのバナーに件数が出ます。放置が続くと 黄 → 赤 に自動で上がります。</a:t>
+            </a:r>
+            <a:endParaRPr lang="en-US" sz="1300" dirty="0"/>
+          </a:p>
+        </p:txBody>
+      </p:sp>
+      <p:sp>
+        <p:nvSpPr>
+          <p:cNvPr id="5" name="Shape 3"/>
+          <p:cNvSpPr/>
+          <p:nvPr/>
+        </p:nvSpPr>
+        <p:spPr>
+          <a:xfrm>
+            <a:off x="640080" y="1783080"/>
+            <a:ext cx="5257800" cy="3977640"/>
           </a:xfrm>
           <a:prstGeom prst="roundRect">
             <a:avLst>
-              <a:gd name="adj" fmla="val 8421"/>
+              <a:gd name="adj" fmla="val 1839"/>
+            </a:avLst>
+          </a:prstGeom>
+          <a:solidFill>
+            <a:srgbClr val="FFF9EC"/>
+          </a:solidFill>
+          <a:ln w="12700">
+            <a:solidFill>
+              <a:srgbClr val="F0DBB0"/>
+            </a:solidFill>
+            <a:prstDash val="solid"/>
+          </a:ln>
+        </p:spPr>
+      </p:sp>
+      <p:sp>
+        <p:nvSpPr>
+          <p:cNvPr id="6" name="Text 4"/>
+          <p:cNvSpPr/>
+          <p:nvPr/>
+        </p:nvSpPr>
+        <p:spPr>
+          <a:xfrm>
+            <a:off x="914400" y="2011680"/>
+            <a:ext cx="2103120" cy="548640"/>
+          </a:xfrm>
+          <a:prstGeom prst="roundRect">
+            <a:avLst>
+              <a:gd name="adj" fmla="val 10000"/>
             </a:avLst>
           </a:prstGeom>
           <a:solidFill>
@@ -3513,7 +3579,7 @@
               <a:buNone/>
             </a:pPr>
             <a:r>
-              <a:rPr lang="en-US" sz="1800" b="1" dirty="0">
+              <a:rPr lang="en-US" sz="1500" b="1" dirty="0">
                 <a:solidFill>
                   <a:srgbClr val="3A2600"/>
                 </a:solidFill>
@@ -3523,44 +3589,44 @@
               </a:rPr>
               <a:t>要確認案件</a:t>
             </a:r>
-            <a:endParaRPr lang="en-US" sz="1800" dirty="0"/>
-          </a:p>
-        </p:txBody>
-      </p:sp>
-      <p:sp>
-        <p:nvSpPr>
-          <p:cNvPr id="5" name="Text 3"/>
-          <p:cNvSpPr/>
-          <p:nvPr/>
-        </p:nvSpPr>
-        <p:spPr>
-          <a:xfrm>
-            <a:off x="640080" y="2606040"/>
-            <a:ext cx="2743200" cy="320040"/>
-          </a:xfrm>
-          <a:prstGeom prst="rect">
-            <a:avLst/>
-          </a:prstGeom>
-          <a:noFill/>
-          <a:ln/>
-        </p:spPr>
-        <p:txBody>
-          <a:bodyPr wrap="square" lIns="0" tIns="0" rIns="0" bIns="0" rtlCol="0" anchor="ctr"/>
-          <a:lstStyle/>
-          <a:p>
-            <a:pPr algn="ctr" indent="0" marL="0">
+            <a:endParaRPr lang="en-US" sz="1500" dirty="0"/>
+          </a:p>
+        </p:txBody>
+      </p:sp>
+      <p:sp>
+        <p:nvSpPr>
+          <p:cNvPr id="7" name="Text 5"/>
+          <p:cNvSpPr/>
+          <p:nvPr/>
+        </p:nvSpPr>
+        <p:spPr>
+          <a:xfrm>
+            <a:off x="3154680" y="2011680"/>
+            <a:ext cx="2377440" cy="548640"/>
+          </a:xfrm>
+          <a:prstGeom prst="rect">
+            <a:avLst/>
+          </a:prstGeom>
+          <a:noFill/>
+          <a:ln/>
+        </p:spPr>
+        <p:txBody>
+          <a:bodyPr wrap="square" lIns="0" tIns="0" rIns="0" bIns="0" rtlCol="0" anchor="ctr"/>
+          <a:lstStyle/>
+          <a:p>
+            <a:pPr indent="0" marL="0">
               <a:buNone/>
             </a:pPr>
             <a:r>
               <a:rPr lang="en-US" sz="1200" dirty="0">
                 <a:solidFill>
-                  <a:srgbClr val="6B7280"/>
-                </a:solidFill>
-                <a:latin typeface="Meiryo" pitchFamily="34" charset="0"/>
-                <a:ea typeface="Meiryo" pitchFamily="34" charset="-122"/>
-                <a:cs typeface="Meiryo" pitchFamily="34" charset="-120"/>
-              </a:rPr>
-              <a:t>少し放置。早めに（黄）</a:t>
+                  <a:srgbClr val="8A5A00"/>
+                </a:solidFill>
+                <a:latin typeface="Meiryo" pitchFamily="34" charset="0"/>
+                <a:ea typeface="Meiryo" pitchFamily="34" charset="-122"/>
+                <a:cs typeface="Meiryo" pitchFamily="34" charset="-120"/>
+              </a:rPr>
+              <a:t>早めに（黄）</a:t>
             </a:r>
             <a:endParaRPr lang="en-US" sz="1200" dirty="0"/>
           </a:p>
@@ -3568,18 +3634,401 @@
       </p:sp>
       <p:sp>
         <p:nvSpPr>
-          <p:cNvPr id="6" name="Text 4"/>
-          <p:cNvSpPr/>
-          <p:nvPr/>
-        </p:nvSpPr>
-        <p:spPr>
-          <a:xfrm>
-            <a:off x="3703320" y="1691640"/>
-            <a:ext cx="2743200" cy="868680"/>
+          <p:cNvPr id="8" name="Text 6"/>
+          <p:cNvSpPr/>
+          <p:nvPr/>
+        </p:nvSpPr>
+        <p:spPr>
+          <a:xfrm>
+            <a:off x="960120" y="2743200"/>
+            <a:ext cx="3200400" cy="502920"/>
+          </a:xfrm>
+          <a:prstGeom prst="rect">
+            <a:avLst/>
+          </a:prstGeom>
+          <a:noFill/>
+          <a:ln/>
+        </p:spPr>
+        <p:txBody>
+          <a:bodyPr wrap="square" lIns="0" tIns="0" rIns="0" bIns="0" rtlCol="0" anchor="ctr"/>
+          <a:lstStyle/>
+          <a:p>
+            <a:pPr marL="152400" indent="-152400">
+              <a:buSzPct val="100000"/>
+              <a:buChar char="•"/>
+            </a:pPr>
+            <a:r>
+              <a:rPr lang="en-US" sz="1250" dirty="0">
+                <a:solidFill>
+                  <a:srgbClr val="2A2E45"/>
+                </a:solidFill>
+                <a:latin typeface="Meiryo" pitchFamily="34" charset="0"/>
+                <a:ea typeface="Meiryo" pitchFamily="34" charset="-122"/>
+                <a:cs typeface="Meiryo" pitchFamily="34" charset="-120"/>
+              </a:rPr>
+              <a:t>タスクの期日</a:t>
+            </a:r>
+            <a:endParaRPr lang="en-US" sz="1250" dirty="0"/>
+          </a:p>
+        </p:txBody>
+      </p:sp>
+      <p:sp>
+        <p:nvSpPr>
+          <p:cNvPr id="9" name="Text 7"/>
+          <p:cNvSpPr/>
+          <p:nvPr/>
+        </p:nvSpPr>
+        <p:spPr>
+          <a:xfrm>
+            <a:off x="4206240" y="2743200"/>
+            <a:ext cx="1554480" cy="502920"/>
+          </a:xfrm>
+          <a:prstGeom prst="rect">
+            <a:avLst/>
+          </a:prstGeom>
+          <a:noFill/>
+          <a:ln/>
+        </p:spPr>
+        <p:txBody>
+          <a:bodyPr wrap="square" lIns="0" tIns="0" rIns="0" bIns="0" rtlCol="0" anchor="ctr"/>
+          <a:lstStyle/>
+          <a:p>
+            <a:pPr algn="r" indent="0" marL="0">
+              <a:buNone/>
+            </a:pPr>
+            <a:r>
+              <a:rPr lang="en-US" sz="1200" b="1" dirty="0">
+                <a:solidFill>
+                  <a:srgbClr val="B5651D"/>
+                </a:solidFill>
+                <a:latin typeface="Meiryo" pitchFamily="34" charset="0"/>
+                <a:ea typeface="Meiryo" pitchFamily="34" charset="-122"/>
+                <a:cs typeface="Meiryo" pitchFamily="34" charset="-120"/>
+              </a:rPr>
+              <a:t>5営業日 超過</a:t>
+            </a:r>
+            <a:endParaRPr lang="en-US" sz="1200" dirty="0"/>
+          </a:p>
+        </p:txBody>
+      </p:sp>
+      <p:sp>
+        <p:nvSpPr>
+          <p:cNvPr id="10" name="Text 8"/>
+          <p:cNvSpPr/>
+          <p:nvPr/>
+        </p:nvSpPr>
+        <p:spPr>
+          <a:xfrm>
+            <a:off x="960120" y="3319272"/>
+            <a:ext cx="3200400" cy="502920"/>
+          </a:xfrm>
+          <a:prstGeom prst="rect">
+            <a:avLst/>
+          </a:prstGeom>
+          <a:noFill/>
+          <a:ln/>
+        </p:spPr>
+        <p:txBody>
+          <a:bodyPr wrap="square" lIns="0" tIns="0" rIns="0" bIns="0" rtlCol="0" anchor="ctr"/>
+          <a:lstStyle/>
+          <a:p>
+            <a:pPr marL="152400" indent="-152400">
+              <a:buSzPct val="100000"/>
+              <a:buChar char="•"/>
+            </a:pPr>
+            <a:r>
+              <a:rPr lang="en-US" sz="1250" dirty="0">
+                <a:solidFill>
+                  <a:srgbClr val="2A2E45"/>
+                </a:solidFill>
+                <a:latin typeface="Meiryo" pitchFamily="34" charset="0"/>
+                <a:ea typeface="Meiryo" pitchFamily="34" charset="-122"/>
+                <a:cs typeface="Meiryo" pitchFamily="34" charset="-120"/>
+              </a:rPr>
+              <a:t>入金（請求）の期日</a:t>
+            </a:r>
+            <a:endParaRPr lang="en-US" sz="1250" dirty="0"/>
+          </a:p>
+        </p:txBody>
+      </p:sp>
+      <p:sp>
+        <p:nvSpPr>
+          <p:cNvPr id="11" name="Text 9"/>
+          <p:cNvSpPr/>
+          <p:nvPr/>
+        </p:nvSpPr>
+        <p:spPr>
+          <a:xfrm>
+            <a:off x="4206240" y="3319272"/>
+            <a:ext cx="1554480" cy="502920"/>
+          </a:xfrm>
+          <a:prstGeom prst="rect">
+            <a:avLst/>
+          </a:prstGeom>
+          <a:noFill/>
+          <a:ln/>
+        </p:spPr>
+        <p:txBody>
+          <a:bodyPr wrap="square" lIns="0" tIns="0" rIns="0" bIns="0" rtlCol="0" anchor="ctr"/>
+          <a:lstStyle/>
+          <a:p>
+            <a:pPr algn="r" indent="0" marL="0">
+              <a:buNone/>
+            </a:pPr>
+            <a:r>
+              <a:rPr lang="en-US" sz="1200" b="1" dirty="0">
+                <a:solidFill>
+                  <a:srgbClr val="B5651D"/>
+                </a:solidFill>
+                <a:latin typeface="Meiryo" pitchFamily="34" charset="0"/>
+                <a:ea typeface="Meiryo" pitchFamily="34" charset="-122"/>
+                <a:cs typeface="Meiryo" pitchFamily="34" charset="-120"/>
+              </a:rPr>
+              <a:t>5営業日 超過</a:t>
+            </a:r>
+            <a:endParaRPr lang="en-US" sz="1200" dirty="0"/>
+          </a:p>
+        </p:txBody>
+      </p:sp>
+      <p:sp>
+        <p:nvSpPr>
+          <p:cNvPr id="12" name="Text 10"/>
+          <p:cNvSpPr/>
+          <p:nvPr/>
+        </p:nvSpPr>
+        <p:spPr>
+          <a:xfrm>
+            <a:off x="960120" y="3895344"/>
+            <a:ext cx="3200400" cy="502920"/>
+          </a:xfrm>
+          <a:prstGeom prst="rect">
+            <a:avLst/>
+          </a:prstGeom>
+          <a:noFill/>
+          <a:ln/>
+        </p:spPr>
+        <p:txBody>
+          <a:bodyPr wrap="square" lIns="0" tIns="0" rIns="0" bIns="0" rtlCol="0" anchor="ctr"/>
+          <a:lstStyle/>
+          <a:p>
+            <a:pPr marL="152400" indent="-152400">
+              <a:buSzPct val="100000"/>
+              <a:buChar char="•"/>
+            </a:pPr>
+            <a:r>
+              <a:rPr lang="en-US" sz="1250" dirty="0">
+                <a:solidFill>
+                  <a:srgbClr val="2A2E45"/>
+                </a:solidFill>
+                <a:latin typeface="Meiryo" pitchFamily="34" charset="0"/>
+                <a:ea typeface="Meiryo" pitchFamily="34" charset="-122"/>
+                <a:cs typeface="Meiryo" pitchFamily="34" charset="-120"/>
+              </a:rPr>
+              <a:t>未対応（最後に開いてから）</a:t>
+            </a:r>
+            <a:endParaRPr lang="en-US" sz="1250" dirty="0"/>
+          </a:p>
+        </p:txBody>
+      </p:sp>
+      <p:sp>
+        <p:nvSpPr>
+          <p:cNvPr id="13" name="Text 11"/>
+          <p:cNvSpPr/>
+          <p:nvPr/>
+        </p:nvSpPr>
+        <p:spPr>
+          <a:xfrm>
+            <a:off x="4206240" y="3895344"/>
+            <a:ext cx="1554480" cy="502920"/>
+          </a:xfrm>
+          <a:prstGeom prst="rect">
+            <a:avLst/>
+          </a:prstGeom>
+          <a:noFill/>
+          <a:ln/>
+        </p:spPr>
+        <p:txBody>
+          <a:bodyPr wrap="square" lIns="0" tIns="0" rIns="0" bIns="0" rtlCol="0" anchor="ctr"/>
+          <a:lstStyle/>
+          <a:p>
+            <a:pPr algn="r" indent="0" marL="0">
+              <a:buNone/>
+            </a:pPr>
+            <a:r>
+              <a:rPr lang="en-US" sz="1200" b="1" dirty="0">
+                <a:solidFill>
+                  <a:srgbClr val="B5651D"/>
+                </a:solidFill>
+                <a:latin typeface="Meiryo" pitchFamily="34" charset="0"/>
+                <a:ea typeface="Meiryo" pitchFamily="34" charset="-122"/>
+                <a:cs typeface="Meiryo" pitchFamily="34" charset="-120"/>
+              </a:rPr>
+              <a:t>5営業日 超</a:t>
+            </a:r>
+            <a:endParaRPr lang="en-US" sz="1200" dirty="0"/>
+          </a:p>
+        </p:txBody>
+      </p:sp>
+      <p:sp>
+        <p:nvSpPr>
+          <p:cNvPr id="14" name="Text 12"/>
+          <p:cNvSpPr/>
+          <p:nvPr/>
+        </p:nvSpPr>
+        <p:spPr>
+          <a:xfrm>
+            <a:off x="960120" y="4471416"/>
+            <a:ext cx="3200400" cy="502920"/>
+          </a:xfrm>
+          <a:prstGeom prst="rect">
+            <a:avLst/>
+          </a:prstGeom>
+          <a:noFill/>
+          <a:ln/>
+        </p:spPr>
+        <p:txBody>
+          <a:bodyPr wrap="square" lIns="0" tIns="0" rIns="0" bIns="0" rtlCol="0" anchor="ctr"/>
+          <a:lstStyle/>
+          <a:p>
+            <a:pPr marL="152400" indent="-152400">
+              <a:buSzPct val="100000"/>
+              <a:buChar char="•"/>
+            </a:pPr>
+            <a:r>
+              <a:rPr lang="en-US" sz="1250" dirty="0">
+                <a:solidFill>
+                  <a:srgbClr val="2A2E45"/>
+                </a:solidFill>
+                <a:latin typeface="Meiryo" pitchFamily="34" charset="0"/>
+                <a:ea typeface="Meiryo" pitchFamily="34" charset="-122"/>
+                <a:cs typeface="Meiryo" pitchFamily="34" charset="-120"/>
+              </a:rPr>
+              <a:t>週次報告の漏れ／回答予定日</a:t>
+            </a:r>
+            <a:endParaRPr lang="en-US" sz="1250" dirty="0"/>
+          </a:p>
+        </p:txBody>
+      </p:sp>
+      <p:sp>
+        <p:nvSpPr>
+          <p:cNvPr id="15" name="Text 13"/>
+          <p:cNvSpPr/>
+          <p:nvPr/>
+        </p:nvSpPr>
+        <p:spPr>
+          <a:xfrm>
+            <a:off x="4206240" y="4471416"/>
+            <a:ext cx="1554480" cy="502920"/>
+          </a:xfrm>
+          <a:prstGeom prst="rect">
+            <a:avLst/>
+          </a:prstGeom>
+          <a:noFill/>
+          <a:ln/>
+        </p:spPr>
+        <p:txBody>
+          <a:bodyPr wrap="square" lIns="0" tIns="0" rIns="0" bIns="0" rtlCol="0" anchor="ctr"/>
+          <a:lstStyle/>
+          <a:p>
+            <a:pPr algn="r" indent="0" marL="0">
+              <a:buNone/>
+            </a:pPr>
+            <a:r>
+              <a:rPr lang="en-US" sz="1200" b="1" dirty="0">
+                <a:solidFill>
+                  <a:srgbClr val="B5651D"/>
+                </a:solidFill>
+                <a:latin typeface="Meiryo" pitchFamily="34" charset="0"/>
+                <a:ea typeface="Meiryo" pitchFamily="34" charset="-122"/>
+                <a:cs typeface="Meiryo" pitchFamily="34" charset="-120"/>
+              </a:rPr>
+              <a:t>漏れ・間近</a:t>
+            </a:r>
+            <a:endParaRPr lang="en-US" sz="1200" dirty="0"/>
+          </a:p>
+        </p:txBody>
+      </p:sp>
+      <p:sp>
+        <p:nvSpPr>
+          <p:cNvPr id="16" name="Text 14"/>
+          <p:cNvSpPr/>
+          <p:nvPr/>
+        </p:nvSpPr>
+        <p:spPr>
+          <a:xfrm>
+            <a:off x="960120" y="5047488"/>
+            <a:ext cx="3200400" cy="502920"/>
+          </a:xfrm>
+          <a:prstGeom prst="rect">
+            <a:avLst/>
+          </a:prstGeom>
+          <a:noFill/>
+          <a:ln/>
+        </p:spPr>
+        <p:txBody>
+          <a:bodyPr wrap="square" lIns="0" tIns="0" rIns="0" bIns="0" rtlCol="0" anchor="ctr"/>
+          <a:lstStyle/>
+          <a:p>
+            <a:pPr marL="152400" indent="-152400">
+              <a:buSzPct val="100000"/>
+              <a:buChar char="•"/>
+            </a:pPr>
+            <a:r>
+              <a:rPr lang="en-US" sz="1250" dirty="0">
+                <a:solidFill>
+                  <a:srgbClr val="2A2E45"/>
+                </a:solidFill>
+                <a:latin typeface="Meiryo" pitchFamily="34" charset="0"/>
+                <a:ea typeface="Meiryo" pitchFamily="34" charset="-122"/>
+                <a:cs typeface="Meiryo" pitchFamily="34" charset="-120"/>
+              </a:rPr>
+              <a:t>面談メモ 未記載</a:t>
+            </a:r>
+            <a:endParaRPr lang="en-US" sz="1250" dirty="0"/>
+          </a:p>
+        </p:txBody>
+      </p:sp>
+      <p:sp>
+        <p:nvSpPr>
+          <p:cNvPr id="17" name="Shape 15"/>
+          <p:cNvSpPr/>
+          <p:nvPr/>
+        </p:nvSpPr>
+        <p:spPr>
+          <a:xfrm>
+            <a:off x="6263640" y="1783080"/>
+            <a:ext cx="5257800" cy="3977640"/>
           </a:xfrm>
           <a:prstGeom prst="roundRect">
             <a:avLst>
-              <a:gd name="adj" fmla="val 8421"/>
+              <a:gd name="adj" fmla="val 1839"/>
+            </a:avLst>
+          </a:prstGeom>
+          <a:solidFill>
+            <a:srgbClr val="FCEEE9"/>
+          </a:solidFill>
+          <a:ln w="12700">
+            <a:solidFill>
+              <a:srgbClr val="F0C9BC"/>
+            </a:solidFill>
+            <a:prstDash val="solid"/>
+          </a:ln>
+        </p:spPr>
+      </p:sp>
+      <p:sp>
+        <p:nvSpPr>
+          <p:cNvPr id="18" name="Text 16"/>
+          <p:cNvSpPr/>
+          <p:nvPr/>
+        </p:nvSpPr>
+        <p:spPr>
+          <a:xfrm>
+            <a:off x="6537960" y="2011680"/>
+            <a:ext cx="2103120" cy="548640"/>
+          </a:xfrm>
+          <a:prstGeom prst="roundRect">
+            <a:avLst>
+              <a:gd name="adj" fmla="val 10000"/>
             </a:avLst>
           </a:prstGeom>
           <a:solidFill>
@@ -3595,7 +4044,7 @@
               <a:buNone/>
             </a:pPr>
             <a:r>
-              <a:rPr lang="en-US" sz="1800" b="1" dirty="0">
+              <a:rPr lang="en-US" sz="1500" b="1" dirty="0">
                 <a:solidFill>
                   <a:srgbClr val="FFFFFF"/>
                 </a:solidFill>
@@ -3605,44 +4054,44 @@
               </a:rPr>
               <a:t>要注意案件</a:t>
             </a:r>
-            <a:endParaRPr lang="en-US" sz="1800" dirty="0"/>
-          </a:p>
-        </p:txBody>
-      </p:sp>
-      <p:sp>
-        <p:nvSpPr>
-          <p:cNvPr id="7" name="Text 5"/>
-          <p:cNvSpPr/>
-          <p:nvPr/>
-        </p:nvSpPr>
-        <p:spPr>
-          <a:xfrm>
-            <a:off x="3703320" y="2606040"/>
-            <a:ext cx="2743200" cy="320040"/>
-          </a:xfrm>
-          <a:prstGeom prst="rect">
-            <a:avLst/>
-          </a:prstGeom>
-          <a:noFill/>
-          <a:ln/>
-        </p:spPr>
-        <p:txBody>
-          <a:bodyPr wrap="square" lIns="0" tIns="0" rIns="0" bIns="0" rtlCol="0" anchor="ctr"/>
-          <a:lstStyle/>
-          <a:p>
-            <a:pPr algn="ctr" indent="0" marL="0">
+            <a:endParaRPr lang="en-US" sz="1500" dirty="0"/>
+          </a:p>
+        </p:txBody>
+      </p:sp>
+      <p:sp>
+        <p:nvSpPr>
+          <p:cNvPr id="19" name="Text 17"/>
+          <p:cNvSpPr/>
+          <p:nvPr/>
+        </p:nvSpPr>
+        <p:spPr>
+          <a:xfrm>
+            <a:off x="8778240" y="2011680"/>
+            <a:ext cx="2377440" cy="548640"/>
+          </a:xfrm>
+          <a:prstGeom prst="rect">
+            <a:avLst/>
+          </a:prstGeom>
+          <a:noFill/>
+          <a:ln/>
+        </p:spPr>
+        <p:txBody>
+          <a:bodyPr wrap="square" lIns="0" tIns="0" rIns="0" bIns="0" rtlCol="0" anchor="ctr"/>
+          <a:lstStyle/>
+          <a:p>
+            <a:pPr indent="0" marL="0">
               <a:buNone/>
             </a:pPr>
             <a:r>
               <a:rPr lang="en-US" sz="1200" dirty="0">
                 <a:solidFill>
-                  <a:srgbClr val="6B7280"/>
-                </a:solidFill>
-                <a:latin typeface="Meiryo" pitchFamily="34" charset="0"/>
-                <a:ea typeface="Meiryo" pitchFamily="34" charset="-122"/>
-                <a:cs typeface="Meiryo" pitchFamily="34" charset="-120"/>
-              </a:rPr>
-              <a:t>放置が続いた／至急（赤）</a:t>
+                  <a:srgbClr val="A0341A"/>
+                </a:solidFill>
+                <a:latin typeface="Meiryo" pitchFamily="34" charset="0"/>
+                <a:ea typeface="Meiryo" pitchFamily="34" charset="-122"/>
+                <a:cs typeface="Meiryo" pitchFamily="34" charset="-120"/>
+              </a:rPr>
+              <a:t>今すぐ（赤）</a:t>
             </a:r>
             <a:endParaRPr lang="en-US" sz="1200" dirty="0"/>
           </a:p>
@@ -3650,70 +4099,31 @@
       </p:sp>
       <p:sp>
         <p:nvSpPr>
-          <p:cNvPr id="8" name="Text 6"/>
-          <p:cNvSpPr/>
-          <p:nvPr/>
-        </p:nvSpPr>
-        <p:spPr>
-          <a:xfrm>
-            <a:off x="640080" y="3246120"/>
-            <a:ext cx="5486400" cy="365760"/>
-          </a:xfrm>
-          <a:prstGeom prst="rect">
-            <a:avLst/>
-          </a:prstGeom>
-          <a:noFill/>
-          <a:ln/>
-        </p:spPr>
-        <p:txBody>
-          <a:bodyPr wrap="square" lIns="0" tIns="0" rIns="0" bIns="0" rtlCol="0" anchor="ctr"/>
-          <a:lstStyle/>
-          <a:p>
-            <a:pPr indent="0" marL="0">
-              <a:buNone/>
-            </a:pPr>
-            <a:r>
-              <a:rPr lang="en-US" sz="1500" b="1" dirty="0">
-                <a:solidFill>
-                  <a:srgbClr val="2A2E45"/>
-                </a:solidFill>
-                <a:latin typeface="Meiryo" pitchFamily="34" charset="0"/>
-                <a:ea typeface="Meiryo" pitchFamily="34" charset="-122"/>
-                <a:cs typeface="Meiryo" pitchFamily="34" charset="-120"/>
-              </a:rPr>
-              <a:t>こんな時に光る</a:t>
-            </a:r>
-            <a:endParaRPr lang="en-US" sz="1500" dirty="0"/>
-          </a:p>
-        </p:txBody>
-      </p:sp>
-      <p:sp>
-        <p:nvSpPr>
-          <p:cNvPr id="9" name="Text 7"/>
-          <p:cNvSpPr/>
-          <p:nvPr/>
-        </p:nvSpPr>
-        <p:spPr>
-          <a:xfrm>
-            <a:off x="640080" y="3703320"/>
-            <a:ext cx="5852160" cy="384048"/>
-          </a:xfrm>
-          <a:prstGeom prst="rect">
-            <a:avLst/>
-          </a:prstGeom>
-          <a:noFill/>
-          <a:ln/>
-        </p:spPr>
-        <p:txBody>
-          <a:bodyPr wrap="square" lIns="0" tIns="0" rIns="0" bIns="0" rtlCol="0" anchor="ctr"/>
-          <a:lstStyle/>
-          <a:p>
-            <a:pPr marL="342900" indent="-342900">
+          <p:cNvPr id="20" name="Text 18"/>
+          <p:cNvSpPr/>
+          <p:nvPr/>
+        </p:nvSpPr>
+        <p:spPr>
+          <a:xfrm>
+            <a:off x="6583680" y="2743200"/>
+            <a:ext cx="3246120" cy="502920"/>
+          </a:xfrm>
+          <a:prstGeom prst="rect">
+            <a:avLst/>
+          </a:prstGeom>
+          <a:noFill/>
+          <a:ln/>
+        </p:spPr>
+        <p:txBody>
+          <a:bodyPr wrap="square" lIns="0" tIns="0" rIns="0" bIns="0" rtlCol="0" anchor="ctr"/>
+          <a:lstStyle/>
+          <a:p>
+            <a:pPr marL="152400" indent="-152400">
               <a:buSzPct val="100000"/>
               <a:buChar char="•"/>
             </a:pPr>
             <a:r>
-              <a:rPr lang="en-US" sz="1400" dirty="0">
+              <a:rPr lang="en-US" sz="1250" dirty="0">
                 <a:solidFill>
                   <a:srgbClr val="2A2E45"/>
                 </a:solidFill>
@@ -3721,39 +4131,78 @@
                 <a:ea typeface="Meiryo" pitchFamily="34" charset="-122"/>
                 <a:cs typeface="Meiryo" pitchFamily="34" charset="-120"/>
               </a:rPr>
-              <a:t>タスクの期日超過</a:t>
-            </a:r>
-            <a:endParaRPr lang="en-US" sz="1400" dirty="0"/>
-          </a:p>
-        </p:txBody>
-      </p:sp>
-      <p:sp>
-        <p:nvSpPr>
-          <p:cNvPr id="10" name="Text 8"/>
-          <p:cNvSpPr/>
-          <p:nvPr/>
-        </p:nvSpPr>
-        <p:spPr>
-          <a:xfrm>
-            <a:off x="640080" y="4142232"/>
-            <a:ext cx="5852160" cy="384048"/>
-          </a:xfrm>
-          <a:prstGeom prst="rect">
-            <a:avLst/>
-          </a:prstGeom>
-          <a:noFill/>
-          <a:ln/>
-        </p:spPr>
-        <p:txBody>
-          <a:bodyPr wrap="square" lIns="0" tIns="0" rIns="0" bIns="0" rtlCol="0" anchor="ctr"/>
-          <a:lstStyle/>
-          <a:p>
-            <a:pPr marL="342900" indent="-342900">
+              <a:t>タスク／入金の期日</a:t>
+            </a:r>
+            <a:endParaRPr lang="en-US" sz="1250" dirty="0"/>
+          </a:p>
+        </p:txBody>
+      </p:sp>
+      <p:sp>
+        <p:nvSpPr>
+          <p:cNvPr id="21" name="Text 19"/>
+          <p:cNvSpPr/>
+          <p:nvPr/>
+        </p:nvSpPr>
+        <p:spPr>
+          <a:xfrm>
+            <a:off x="9829800" y="2743200"/>
+            <a:ext cx="1600200" cy="502920"/>
+          </a:xfrm>
+          <a:prstGeom prst="rect">
+            <a:avLst/>
+          </a:prstGeom>
+          <a:noFill/>
+          <a:ln/>
+        </p:spPr>
+        <p:txBody>
+          <a:bodyPr wrap="square" lIns="0" tIns="0" rIns="0" bIns="0" rtlCol="0" anchor="ctr"/>
+          <a:lstStyle/>
+          <a:p>
+            <a:pPr algn="r" indent="0" marL="0">
+              <a:buNone/>
+            </a:pPr>
+            <a:r>
+              <a:rPr lang="en-US" sz="1200" b="1" dirty="0">
+                <a:solidFill>
+                  <a:srgbClr val="A0341A"/>
+                </a:solidFill>
+                <a:latin typeface="Meiryo" pitchFamily="34" charset="0"/>
+                <a:ea typeface="Meiryo" pitchFamily="34" charset="-122"/>
+                <a:cs typeface="Meiryo" pitchFamily="34" charset="-120"/>
+              </a:rPr>
+              <a:t>2週間(14日) 以上</a:t>
+            </a:r>
+            <a:endParaRPr lang="en-US" sz="1200" dirty="0"/>
+          </a:p>
+        </p:txBody>
+      </p:sp>
+      <p:sp>
+        <p:nvSpPr>
+          <p:cNvPr id="22" name="Text 20"/>
+          <p:cNvSpPr/>
+          <p:nvPr/>
+        </p:nvSpPr>
+        <p:spPr>
+          <a:xfrm>
+            <a:off x="6583680" y="3319272"/>
+            <a:ext cx="3246120" cy="502920"/>
+          </a:xfrm>
+          <a:prstGeom prst="rect">
+            <a:avLst/>
+          </a:prstGeom>
+          <a:noFill/>
+          <a:ln/>
+        </p:spPr>
+        <p:txBody>
+          <a:bodyPr wrap="square" lIns="0" tIns="0" rIns="0" bIns="0" rtlCol="0" anchor="ctr"/>
+          <a:lstStyle/>
+          <a:p>
+            <a:pPr marL="152400" indent="-152400">
               <a:buSzPct val="100000"/>
               <a:buChar char="•"/>
             </a:pPr>
             <a:r>
-              <a:rPr lang="en-US" sz="1400" dirty="0">
+              <a:rPr lang="en-US" sz="1250" dirty="0">
                 <a:solidFill>
                   <a:srgbClr val="2A2E45"/>
                 </a:solidFill>
@@ -3761,39 +4210,78 @@
                 <a:ea typeface="Meiryo" pitchFamily="34" charset="-122"/>
                 <a:cs typeface="Meiryo" pitchFamily="34" charset="-120"/>
               </a:rPr>
-              <a:t>入金（請求）の期日超過</a:t>
-            </a:r>
-            <a:endParaRPr lang="en-US" sz="1400" dirty="0"/>
-          </a:p>
-        </p:txBody>
-      </p:sp>
-      <p:sp>
-        <p:nvSpPr>
-          <p:cNvPr id="11" name="Text 9"/>
-          <p:cNvSpPr/>
-          <p:nvPr/>
-        </p:nvSpPr>
-        <p:spPr>
-          <a:xfrm>
-            <a:off x="640080" y="4581144"/>
-            <a:ext cx="5852160" cy="384048"/>
-          </a:xfrm>
-          <a:prstGeom prst="rect">
-            <a:avLst/>
-          </a:prstGeom>
-          <a:noFill/>
-          <a:ln/>
-        </p:spPr>
-        <p:txBody>
-          <a:bodyPr wrap="square" lIns="0" tIns="0" rIns="0" bIns="0" rtlCol="0" anchor="ctr"/>
-          <a:lstStyle/>
-          <a:p>
-            <a:pPr marL="342900" indent="-342900">
+              <a:t>管理担当が未アサイン</a:t>
+            </a:r>
+            <a:endParaRPr lang="en-US" sz="1250" dirty="0"/>
+          </a:p>
+        </p:txBody>
+      </p:sp>
+      <p:sp>
+        <p:nvSpPr>
+          <p:cNvPr id="23" name="Text 21"/>
+          <p:cNvSpPr/>
+          <p:nvPr/>
+        </p:nvSpPr>
+        <p:spPr>
+          <a:xfrm>
+            <a:off x="9829800" y="3319272"/>
+            <a:ext cx="1600200" cy="502920"/>
+          </a:xfrm>
+          <a:prstGeom prst="rect">
+            <a:avLst/>
+          </a:prstGeom>
+          <a:noFill/>
+          <a:ln/>
+        </p:spPr>
+        <p:txBody>
+          <a:bodyPr wrap="square" lIns="0" tIns="0" rIns="0" bIns="0" rtlCol="0" anchor="ctr"/>
+          <a:lstStyle/>
+          <a:p>
+            <a:pPr algn="r" indent="0" marL="0">
+              <a:buNone/>
+            </a:pPr>
+            <a:r>
+              <a:rPr lang="en-US" sz="1200" b="1" dirty="0">
+                <a:solidFill>
+                  <a:srgbClr val="A0341A"/>
+                </a:solidFill>
+                <a:latin typeface="Meiryo" pitchFamily="34" charset="0"/>
+                <a:ea typeface="Meiryo" pitchFamily="34" charset="-122"/>
+                <a:cs typeface="Meiryo" pitchFamily="34" charset="-120"/>
+              </a:rPr>
+              <a:t>受注から2営業日</a:t>
+            </a:r>
+            <a:endParaRPr lang="en-US" sz="1200" dirty="0"/>
+          </a:p>
+        </p:txBody>
+      </p:sp>
+      <p:sp>
+        <p:nvSpPr>
+          <p:cNvPr id="24" name="Text 22"/>
+          <p:cNvSpPr/>
+          <p:nvPr/>
+        </p:nvSpPr>
+        <p:spPr>
+          <a:xfrm>
+            <a:off x="6583680" y="3895344"/>
+            <a:ext cx="3246120" cy="502920"/>
+          </a:xfrm>
+          <a:prstGeom prst="rect">
+            <a:avLst/>
+          </a:prstGeom>
+          <a:noFill/>
+          <a:ln/>
+        </p:spPr>
+        <p:txBody>
+          <a:bodyPr wrap="square" lIns="0" tIns="0" rIns="0" bIns="0" rtlCol="0" anchor="ctr"/>
+          <a:lstStyle/>
+          <a:p>
+            <a:pPr marL="152400" indent="-152400">
               <a:buSzPct val="100000"/>
               <a:buChar char="•"/>
             </a:pPr>
             <a:r>
-              <a:rPr lang="en-US" sz="1400" dirty="0">
+              <a:rPr lang="en-US" sz="1250" dirty="0">
                 <a:solidFill>
                   <a:srgbClr val="2A2E45"/>
                 </a:solidFill>
@@ -3801,39 +4289,78 @@
                 <a:ea typeface="Meiryo" pitchFamily="34" charset="-122"/>
                 <a:cs typeface="Meiryo" pitchFamily="34" charset="-120"/>
               </a:rPr>
-              <a:t>管理担当が未アサインのまま</a:t>
-            </a:r>
-            <a:endParaRPr lang="en-US" sz="1400" dirty="0"/>
-          </a:p>
-        </p:txBody>
-      </p:sp>
-      <p:sp>
-        <p:nvSpPr>
-          <p:cNvPr id="12" name="Text 10"/>
-          <p:cNvSpPr/>
-          <p:nvPr/>
-        </p:nvSpPr>
-        <p:spPr>
-          <a:xfrm>
-            <a:off x="640080" y="5020056"/>
-            <a:ext cx="5852160" cy="384048"/>
-          </a:xfrm>
-          <a:prstGeom prst="rect">
-            <a:avLst/>
-          </a:prstGeom>
-          <a:noFill/>
-          <a:ln/>
-        </p:spPr>
-        <p:txBody>
-          <a:bodyPr wrap="square" lIns="0" tIns="0" rIns="0" bIns="0" rtlCol="0" anchor="ctr"/>
-          <a:lstStyle/>
-          <a:p>
-            <a:pPr marL="342900" indent="-342900">
+              <a:t>前受金が未請求</a:t>
+            </a:r>
+            <a:endParaRPr lang="en-US" sz="1250" dirty="0"/>
+          </a:p>
+        </p:txBody>
+      </p:sp>
+      <p:sp>
+        <p:nvSpPr>
+          <p:cNvPr id="25" name="Text 23"/>
+          <p:cNvSpPr/>
+          <p:nvPr/>
+        </p:nvSpPr>
+        <p:spPr>
+          <a:xfrm>
+            <a:off x="9829800" y="3895344"/>
+            <a:ext cx="1600200" cy="502920"/>
+          </a:xfrm>
+          <a:prstGeom prst="rect">
+            <a:avLst/>
+          </a:prstGeom>
+          <a:noFill/>
+          <a:ln/>
+        </p:spPr>
+        <p:txBody>
+          <a:bodyPr wrap="square" lIns="0" tIns="0" rIns="0" bIns="0" rtlCol="0" anchor="ctr"/>
+          <a:lstStyle/>
+          <a:p>
+            <a:pPr algn="r" indent="0" marL="0">
+              <a:buNone/>
+            </a:pPr>
+            <a:r>
+              <a:rPr lang="en-US" sz="1200" b="1" dirty="0">
+                <a:solidFill>
+                  <a:srgbClr val="A0341A"/>
+                </a:solidFill>
+                <a:latin typeface="Meiryo" pitchFamily="34" charset="0"/>
+                <a:ea typeface="Meiryo" pitchFamily="34" charset="-122"/>
+                <a:cs typeface="Meiryo" pitchFamily="34" charset="-120"/>
+              </a:rPr>
+              <a:t>受注から5営業日</a:t>
+            </a:r>
+            <a:endParaRPr lang="en-US" sz="1200" dirty="0"/>
+          </a:p>
+        </p:txBody>
+      </p:sp>
+      <p:sp>
+        <p:nvSpPr>
+          <p:cNvPr id="26" name="Text 24"/>
+          <p:cNvSpPr/>
+          <p:nvPr/>
+        </p:nvSpPr>
+        <p:spPr>
+          <a:xfrm>
+            <a:off x="6583680" y="4471416"/>
+            <a:ext cx="3246120" cy="502920"/>
+          </a:xfrm>
+          <a:prstGeom prst="rect">
+            <a:avLst/>
+          </a:prstGeom>
+          <a:noFill/>
+          <a:ln/>
+        </p:spPr>
+        <p:txBody>
+          <a:bodyPr wrap="square" lIns="0" tIns="0" rIns="0" bIns="0" rtlCol="0" anchor="ctr"/>
+          <a:lstStyle/>
+          <a:p>
+            <a:pPr marL="152400" indent="-152400">
               <a:buSzPct val="100000"/>
               <a:buChar char="•"/>
             </a:pPr>
             <a:r>
-              <a:rPr lang="en-US" sz="1400" dirty="0">
+              <a:rPr lang="en-US" sz="1250" dirty="0">
                 <a:solidFill>
                   <a:srgbClr val="2A2E45"/>
                 </a:solidFill>
@@ -3841,39 +4368,39 @@
                 <a:ea typeface="Meiryo" pitchFamily="34" charset="-122"/>
                 <a:cs typeface="Meiryo" pitchFamily="34" charset="-120"/>
               </a:rPr>
-              <a:t>案件報告の「至急！！」</a:t>
-            </a:r>
-            <a:endParaRPr lang="en-US" sz="1400" dirty="0"/>
-          </a:p>
-        </p:txBody>
-      </p:sp>
-      <p:sp>
-        <p:nvSpPr>
-          <p:cNvPr id="13" name="Text 11"/>
-          <p:cNvSpPr/>
-          <p:nvPr/>
-        </p:nvSpPr>
-        <p:spPr>
-          <a:xfrm>
-            <a:off x="640080" y="5458968"/>
-            <a:ext cx="5852160" cy="384048"/>
-          </a:xfrm>
-          <a:prstGeom prst="rect">
-            <a:avLst/>
-          </a:prstGeom>
-          <a:noFill/>
-          <a:ln/>
-        </p:spPr>
-        <p:txBody>
-          <a:bodyPr wrap="square" lIns="0" tIns="0" rIns="0" bIns="0" rtlCol="0" anchor="ctr"/>
-          <a:lstStyle/>
-          <a:p>
-            <a:pPr marL="342900" indent="-342900">
+              <a:t>完了予定日 超過／前受金 未入金</a:t>
+            </a:r>
+            <a:endParaRPr lang="en-US" sz="1250" dirty="0"/>
+          </a:p>
+        </p:txBody>
+      </p:sp>
+      <p:sp>
+        <p:nvSpPr>
+          <p:cNvPr id="27" name="Text 25"/>
+          <p:cNvSpPr/>
+          <p:nvPr/>
+        </p:nvSpPr>
+        <p:spPr>
+          <a:xfrm>
+            <a:off x="6583680" y="5047488"/>
+            <a:ext cx="3246120" cy="502920"/>
+          </a:xfrm>
+          <a:prstGeom prst="rect">
+            <a:avLst/>
+          </a:prstGeom>
+          <a:noFill/>
+          <a:ln/>
+        </p:spPr>
+        <p:txBody>
+          <a:bodyPr wrap="square" lIns="0" tIns="0" rIns="0" bIns="0" rtlCol="0" anchor="ctr"/>
+          <a:lstStyle/>
+          <a:p>
+            <a:pPr marL="152400" indent="-152400">
               <a:buSzPct val="100000"/>
               <a:buChar char="•"/>
             </a:pPr>
             <a:r>
-              <a:rPr lang="en-US" sz="1400" dirty="0">
+              <a:rPr lang="en-US" sz="1250" dirty="0">
                 <a:solidFill>
                   <a:srgbClr val="2A2E45"/>
                 </a:solidFill>
@@ -3881,22 +4408,61 @@
                 <a:ea typeface="Meiryo" pitchFamily="34" charset="-122"/>
                 <a:cs typeface="Meiryo" pitchFamily="34" charset="-120"/>
               </a:rPr>
-              <a:t>前受金の未請求</a:t>
-            </a:r>
-            <a:endParaRPr lang="en-US" sz="1400" dirty="0"/>
-          </a:p>
-        </p:txBody>
-      </p:sp>
-      <p:sp>
-        <p:nvSpPr>
-          <p:cNvPr id="14" name="Text 12"/>
-          <p:cNvSpPr/>
-          <p:nvPr/>
-        </p:nvSpPr>
-        <p:spPr>
-          <a:xfrm>
-            <a:off x="640080" y="5943600"/>
-            <a:ext cx="6035040" cy="457200"/>
+              <a:t>未対応 ／ 案件報告の「至急！！」</a:t>
+            </a:r>
+            <a:endParaRPr lang="en-US" sz="1250" dirty="0"/>
+          </a:p>
+        </p:txBody>
+      </p:sp>
+      <p:sp>
+        <p:nvSpPr>
+          <p:cNvPr id="28" name="Text 26"/>
+          <p:cNvSpPr/>
+          <p:nvPr/>
+        </p:nvSpPr>
+        <p:spPr>
+          <a:xfrm>
+            <a:off x="9829800" y="5047488"/>
+            <a:ext cx="1600200" cy="502920"/>
+          </a:xfrm>
+          <a:prstGeom prst="rect">
+            <a:avLst/>
+          </a:prstGeom>
+          <a:noFill/>
+          <a:ln/>
+        </p:spPr>
+        <p:txBody>
+          <a:bodyPr wrap="square" lIns="0" tIns="0" rIns="0" bIns="0" rtlCol="0" anchor="ctr"/>
+          <a:lstStyle/>
+          <a:p>
+            <a:pPr algn="r" indent="0" marL="0">
+              <a:buNone/>
+            </a:pPr>
+            <a:r>
+              <a:rPr lang="en-US" sz="1200" b="1" dirty="0">
+                <a:solidFill>
+                  <a:srgbClr val="A0341A"/>
+                </a:solidFill>
+                <a:latin typeface="Meiryo" pitchFamily="34" charset="0"/>
+                <a:ea typeface="Meiryo" pitchFamily="34" charset="-122"/>
+                <a:cs typeface="Meiryo" pitchFamily="34" charset="-120"/>
+              </a:rPr>
+              <a:t>10営業日 超</a:t>
+            </a:r>
+            <a:endParaRPr lang="en-US" sz="1200" dirty="0"/>
+          </a:p>
+        </p:txBody>
+      </p:sp>
+      <p:sp>
+        <p:nvSpPr>
+          <p:cNvPr id="29" name="Text 27"/>
+          <p:cNvSpPr/>
+          <p:nvPr/>
+        </p:nvSpPr>
+        <p:spPr>
+          <a:xfrm>
+            <a:off x="640080" y="5989320"/>
+            <a:ext cx="11155680" cy="457200"/>
           </a:xfrm>
           <a:prstGeom prst="rect">
             <a:avLst/>
@@ -3914,77 +4480,57 @@
             <a:r>
               <a:rPr lang="en-US" sz="1250" b="1" dirty="0">
                 <a:solidFill>
-                  <a:srgbClr val="B5651D"/>
-                </a:solidFill>
-                <a:latin typeface="Meiryo" pitchFamily="34" charset="0"/>
-                <a:ea typeface="Meiryo" pitchFamily="34" charset="-122"/>
-                <a:cs typeface="Meiryo" pitchFamily="34" charset="-120"/>
-              </a:rPr>
-              <a:t>放置が続くと 黄→赤 に自動昇格。誰かが忘れても、システムが赤で知らせる。</a:t>
+                  <a:srgbClr val="7A3B8A"/>
+                </a:solidFill>
+                <a:latin typeface="Meiryo" pitchFamily="34" charset="0"/>
+                <a:ea typeface="Meiryo" pitchFamily="34" charset="-122"/>
+                <a:cs typeface="Meiryo" pitchFamily="34" charset="-120"/>
+              </a:rPr>
+              <a:t>クレーム／大クレーム</a:t>
+            </a:r>
+            <a:pPr indent="0" marL="0">
+              <a:buNone/>
+            </a:pPr>
+            <a:r>
+              <a:rPr lang="en-US" sz="1250" dirty="0">
+                <a:solidFill>
+                  <a:srgbClr val="2A2E45"/>
+                </a:solidFill>
+                <a:latin typeface="Meiryo" pitchFamily="34" charset="0"/>
+                <a:ea typeface="Meiryo" pitchFamily="34" charset="-122"/>
+                <a:cs typeface="Meiryo" pitchFamily="34" charset="-120"/>
+              </a:rPr>
+              <a:t> は案件が </a:t>
+            </a:r>
+            <a:pPr indent="0" marL="0">
+              <a:buNone/>
+            </a:pPr>
+            <a:r>
+              <a:rPr lang="en-US" sz="1250" b="1" dirty="0">
+                <a:solidFill>
+                  <a:srgbClr val="7A3B8A"/>
+                </a:solidFill>
+                <a:latin typeface="Meiryo" pitchFamily="34" charset="0"/>
+                <a:ea typeface="Meiryo" pitchFamily="34" charset="-122"/>
+                <a:cs typeface="Meiryo" pitchFamily="34" charset="-120"/>
+              </a:rPr>
+              <a:t>紫フラグ</a:t>
+            </a:r>
+            <a:pPr indent="0" marL="0">
+              <a:buNone/>
+            </a:pPr>
+            <a:r>
+              <a:rPr lang="en-US" sz="1250" dirty="0">
+                <a:solidFill>
+                  <a:srgbClr val="6B7280"/>
+                </a:solidFill>
+                <a:latin typeface="Meiryo" pitchFamily="34" charset="0"/>
+                <a:ea typeface="Meiryo" pitchFamily="34" charset="-122"/>
+                <a:cs typeface="Meiryo" pitchFamily="34" charset="-120"/>
+              </a:rPr>
+              <a:t>。　営業日＝日曜のみ休み（土曜は営業日）。放置が続くと 黄→赤 に自動昇格。</a:t>
             </a:r>
             <a:endParaRPr lang="en-US" sz="1250" dirty="0"/>
-          </a:p>
-        </p:txBody>
-      </p:sp>
-      <p:sp>
-        <p:nvSpPr>
-          <p:cNvPr id="15" name="Text 13"/>
-          <p:cNvSpPr/>
-          <p:nvPr/>
-        </p:nvSpPr>
-        <p:spPr>
-          <a:xfrm>
-            <a:off x="6492240" y="1691640"/>
-            <a:ext cx="5029200" cy="4480560"/>
-          </a:xfrm>
-          <a:prstGeom prst="roundRect">
-            <a:avLst>
-              <a:gd name="adj" fmla="val 1224"/>
-            </a:avLst>
-          </a:prstGeom>
-          <a:solidFill>
-            <a:srgbClr val="EEF3FC"/>
-          </a:solidFill>
-          <a:ln w="15875">
-            <a:solidFill>
-              <a:srgbClr val="CADCFC"/>
-            </a:solidFill>
-            <a:prstDash val="dash"/>
-          </a:ln>
-        </p:spPr>
-        <p:txBody>
-          <a:bodyPr wrap="square" lIns="1016" tIns="1016" rIns="1016" bIns="1016" rtlCol="0" anchor="ctr"/>
-          <a:lstStyle/>
-          <a:p>
-            <a:pPr algn="ctr" indent="0" marL="0">
-              <a:buNone/>
-            </a:pPr>
-            <a:r>
-              <a:rPr lang="en-US" sz="1200" dirty="0">
-                <a:solidFill>
-                  <a:srgbClr val="CADCFC"/>
-                </a:solidFill>
-                <a:latin typeface="Meiryo" pitchFamily="34" charset="0"/>
-                <a:ea typeface="Meiryo" pitchFamily="34" charset="-122"/>
-                <a:cs typeface="Meiryo" pitchFamily="34" charset="-120"/>
-              </a:rPr>
-              <a:t>▲  </a:t>
-            </a:r>
-            <a:pPr algn="ctr" indent="0" marL="0">
-              <a:buNone/>
-            </a:pPr>
-            <a:r>
-              <a:rPr lang="en-US" sz="1200" dirty="0">
-                <a:solidFill>
-                  <a:srgbClr val="6B7280"/>
-                </a:solidFill>
-                <a:latin typeface="Meiryo" pitchFamily="34" charset="0"/>
-                <a:ea typeface="Meiryo" pitchFamily="34" charset="-122"/>
-                <a:cs typeface="Meiryo" pitchFamily="34" charset="-120"/>
-              </a:rPr>
-              <a:t>マイページ上部の 要確認/要注意 バナー</a:t>
-            </a:r>
-            <a:endParaRPr lang="en-US" sz="1200" dirty="0"/>
           </a:p>
         </p:txBody>
       </p:sp>
@@ -10456,7 +11002,7 @@
                 <a:ea typeface="Meiryo" pitchFamily="34" charset="-122"/>
                 <a:cs typeface="Meiryo" pitchFamily="34" charset="-120"/>
               </a:rPr>
-              <a:t>案件はこう流れる</a:t>
+              <a:t>案件はこう流れる — 受注から納品まで一本道</a:t>
             </a:r>
             <a:endParaRPr lang="en-US" sz="2900" dirty="0"/>
           </a:p>
@@ -10464,14 +11010,53 @@
       </p:sp>
       <p:sp>
         <p:nvSpPr>
-          <p:cNvPr id="4" name="Shape 2"/>
-          <p:cNvSpPr/>
-          <p:nvPr/>
-        </p:nvSpPr>
-        <p:spPr>
-          <a:xfrm>
-            <a:off x="640080" y="1828800"/>
-            <a:ext cx="1673352" cy="3566160"/>
+          <p:cNvPr id="4" name="Text 2"/>
+          <p:cNvSpPr/>
+          <p:nvPr/>
+        </p:nvSpPr>
+        <p:spPr>
+          <a:xfrm>
+            <a:off x="640080" y="1389888"/>
+            <a:ext cx="11155680" cy="365760"/>
+          </a:xfrm>
+          <a:prstGeom prst="rect">
+            <a:avLst/>
+          </a:prstGeom>
+          <a:noFill/>
+          <a:ln/>
+        </p:spPr>
+        <p:txBody>
+          <a:bodyPr wrap="square" lIns="0" tIns="0" rIns="0" bIns="0" rtlCol="0" anchor="ctr"/>
+          <a:lstStyle/>
+          <a:p>
+            <a:pPr indent="0" marL="0">
+              <a:buNone/>
+            </a:pPr>
+            <a:r>
+              <a:rPr lang="en-US" sz="1350" dirty="0">
+                <a:solidFill>
+                  <a:srgbClr val="6B7280"/>
+                </a:solidFill>
+                <a:latin typeface="Meiryo" pitchFamily="34" charset="0"/>
+                <a:ea typeface="Meiryo" pitchFamily="34" charset="-122"/>
+                <a:cs typeface="Meiryo" pitchFamily="34" charset="-120"/>
+              </a:rPr>
+              <a:t>ステータスが「今どこにいるか」を表し、各フェーズの条件（ゲート）が揃うと次へ進む。だから迷わない・止まらない。</a:t>
+            </a:r>
+            <a:endParaRPr lang="en-US" sz="1350" dirty="0"/>
+          </a:p>
+        </p:txBody>
+      </p:sp>
+      <p:sp>
+        <p:nvSpPr>
+          <p:cNvPr id="5" name="Shape 3"/>
+          <p:cNvSpPr/>
+          <p:nvPr/>
+        </p:nvSpPr>
+        <p:spPr>
+          <a:xfrm>
+            <a:off x="640080" y="1874520"/>
+            <a:ext cx="1673352" cy="3200400"/>
           </a:xfrm>
           <a:prstGeom prst="roundRect">
             <a:avLst>
@@ -10491,14 +11076,14 @@
       </p:sp>
       <p:sp>
         <p:nvSpPr>
-          <p:cNvPr id="5" name="Text 3"/>
-          <p:cNvSpPr/>
-          <p:nvPr/>
-        </p:nvSpPr>
-        <p:spPr>
-          <a:xfrm>
-            <a:off x="1220724" y="2057400"/>
-            <a:ext cx="512064" cy="512064"/>
+          <p:cNvPr id="6" name="Text 4"/>
+          <p:cNvSpPr/>
+          <p:nvPr/>
+        </p:nvSpPr>
+        <p:spPr>
+          <a:xfrm>
+            <a:off x="1229868" y="2075688"/>
+            <a:ext cx="493776" cy="493776"/>
           </a:xfrm>
           <a:prstGeom prst="ellipse">
             <a:avLst/>
@@ -10532,14 +11117,14 @@
       </p:sp>
       <p:sp>
         <p:nvSpPr>
-          <p:cNvPr id="6" name="Text 4"/>
-          <p:cNvSpPr/>
-          <p:nvPr/>
-        </p:nvSpPr>
-        <p:spPr>
-          <a:xfrm>
-            <a:off x="640080" y="2697480"/>
-            <a:ext cx="1673352" cy="365760"/>
+          <p:cNvPr id="7" name="Text 5"/>
+          <p:cNvSpPr/>
+          <p:nvPr/>
+        </p:nvSpPr>
+        <p:spPr>
+          <a:xfrm>
+            <a:off x="640080" y="2651760"/>
+            <a:ext cx="1673352" cy="347472"/>
           </a:xfrm>
           <a:prstGeom prst="rect">
             <a:avLst/>
@@ -10555,7 +11140,7 @@
               <a:buNone/>
             </a:pPr>
             <a:r>
-              <a:rPr lang="en-US" sz="1600" b="1" dirty="0">
+              <a:rPr lang="en-US" sz="1500" b="1" dirty="0">
                 <a:solidFill>
                   <a:srgbClr val="2A2E45"/>
                 </a:solidFill>
@@ -10565,20 +11150,20 @@
               </a:rPr>
               <a:t>面談</a:t>
             </a:r>
-            <a:endParaRPr lang="en-US" sz="1600" dirty="0"/>
-          </a:p>
-        </p:txBody>
-      </p:sp>
-      <p:sp>
-        <p:nvSpPr>
-          <p:cNvPr id="7" name="Text 5"/>
-          <p:cNvSpPr/>
-          <p:nvPr/>
-        </p:nvSpPr>
-        <p:spPr>
-          <a:xfrm>
-            <a:off x="640080" y="3108960"/>
-            <a:ext cx="1673352" cy="274320"/>
+            <a:endParaRPr lang="en-US" sz="1500" dirty="0"/>
+          </a:p>
+        </p:txBody>
+      </p:sp>
+      <p:sp>
+        <p:nvSpPr>
+          <p:cNvPr id="8" name="Text 6"/>
+          <p:cNvSpPr/>
+          <p:nvPr/>
+        </p:nvSpPr>
+        <p:spPr>
+          <a:xfrm>
+            <a:off x="713232" y="3044952"/>
+            <a:ext cx="1527048" cy="274320"/>
           </a:xfrm>
           <a:prstGeom prst="rect">
             <a:avLst/>
@@ -10594,15 +11179,96 @@
               <a:buNone/>
             </a:pPr>
             <a:r>
+              <a:rPr lang="en-US" sz="1050" b="1" dirty="0">
+                <a:solidFill>
+                  <a:srgbClr val="1E2761"/>
+                </a:solidFill>
+                <a:latin typeface="Meiryo" pitchFamily="34" charset="0"/>
+                <a:ea typeface="Meiryo" pitchFamily="34" charset="-122"/>
+                <a:cs typeface="Meiryo" pitchFamily="34" charset="-120"/>
+              </a:rPr>
+              <a:t>面談設定済</a:t>
+            </a:r>
+            <a:endParaRPr lang="en-US" sz="1050" dirty="0"/>
+          </a:p>
+        </p:txBody>
+      </p:sp>
+      <p:sp>
+        <p:nvSpPr>
+          <p:cNvPr id="9" name="Text 7"/>
+          <p:cNvSpPr/>
+          <p:nvPr/>
+        </p:nvSpPr>
+        <p:spPr>
+          <a:xfrm>
+            <a:off x="640080" y="3355848"/>
+            <a:ext cx="1673352" cy="256032"/>
+          </a:xfrm>
+          <a:prstGeom prst="rect">
+            <a:avLst/>
+          </a:prstGeom>
+          <a:noFill/>
+          <a:ln/>
+        </p:spPr>
+        <p:txBody>
+          <a:bodyPr wrap="square" lIns="0" tIns="0" rIns="0" bIns="0" rtlCol="0" anchor="ctr"/>
+          <a:lstStyle/>
+          <a:p>
+            <a:pPr algn="ctr" indent="0" marL="0">
+              <a:buNone/>
+            </a:pPr>
+            <a:r>
+              <a:rPr lang="en-US" sz="1000" dirty="0">
+                <a:solidFill>
+                  <a:srgbClr val="8A93A8"/>
+                </a:solidFill>
+                <a:latin typeface="Meiryo" pitchFamily="34" charset="0"/>
+                <a:ea typeface="Meiryo" pitchFamily="34" charset="-122"/>
+                <a:cs typeface="Meiryo" pitchFamily="34" charset="-120"/>
+              </a:rPr>
+              <a:t>受注担当</a:t>
+            </a:r>
+            <a:endParaRPr lang="en-US" sz="1000" dirty="0"/>
+          </a:p>
+        </p:txBody>
+      </p:sp>
+      <p:sp>
+        <p:nvSpPr>
+          <p:cNvPr id="10" name="Text 8"/>
+          <p:cNvSpPr/>
+          <p:nvPr/>
+        </p:nvSpPr>
+        <p:spPr>
+          <a:xfrm>
+            <a:off x="749808" y="3703320"/>
+            <a:ext cx="1453896" cy="1188720"/>
+          </a:xfrm>
+          <a:prstGeom prst="rect">
+            <a:avLst/>
+          </a:prstGeom>
+          <a:noFill/>
+          <a:ln/>
+        </p:spPr>
+        <p:txBody>
+          <a:bodyPr wrap="square" lIns="0" tIns="0" rIns="0" bIns="0" rtlCol="0" anchor="t"/>
+          <a:lstStyle/>
+          <a:p>
+            <a:pPr algn="ctr" indent="0" marL="0">
+              <a:lnSpc>
+                <a:spcPct val="105000"/>
+              </a:lnSpc>
+              <a:buNone/>
+            </a:pPr>
+            <a:r>
               <a:rPr lang="en-US" sz="1100" dirty="0">
                 <a:solidFill>
-                  <a:srgbClr val="1E2761"/>
-                </a:solidFill>
-                <a:latin typeface="Meiryo" pitchFamily="34" charset="0"/>
-                <a:ea typeface="Meiryo" pitchFamily="34" charset="-122"/>
-                <a:cs typeface="Meiryo" pitchFamily="34" charset="-120"/>
-              </a:rPr>
-              <a:t>受注</a:t>
+                  <a:srgbClr val="6B7280"/>
+                </a:solidFill>
+                <a:latin typeface="Meiryo" pitchFamily="34" charset="0"/>
+                <a:ea typeface="Meiryo" pitchFamily="34" charset="-122"/>
+                <a:cs typeface="Meiryo" pitchFamily="34" charset="-120"/>
+              </a:rPr>
+              <a:t>面談シートに即入力</a:t>
             </a:r>
             <a:endParaRPr lang="en-US" sz="1100" dirty="0"/>
           </a:p>
@@ -10610,68 +11276,29 @@
       </p:sp>
       <p:sp>
         <p:nvSpPr>
-          <p:cNvPr id="8" name="Text 6"/>
-          <p:cNvSpPr/>
-          <p:nvPr/>
-        </p:nvSpPr>
-        <p:spPr>
-          <a:xfrm>
-            <a:off x="749808" y="3520440"/>
-            <a:ext cx="1453896" cy="1645920"/>
-          </a:xfrm>
-          <a:prstGeom prst="rect">
-            <a:avLst/>
-          </a:prstGeom>
-          <a:noFill/>
-          <a:ln/>
-        </p:spPr>
-        <p:txBody>
-          <a:bodyPr wrap="square" lIns="0" tIns="0" rIns="0" bIns="0" rtlCol="0" anchor="t"/>
+          <p:cNvPr id="11" name="Text 9"/>
+          <p:cNvSpPr/>
+          <p:nvPr/>
+        </p:nvSpPr>
+        <p:spPr>
+          <a:xfrm>
+            <a:off x="2295144" y="2788920"/>
+            <a:ext cx="155448" cy="365760"/>
+          </a:xfrm>
+          <a:prstGeom prst="rect">
+            <a:avLst/>
+          </a:prstGeom>
+          <a:noFill/>
+          <a:ln/>
+        </p:spPr>
+        <p:txBody>
+          <a:bodyPr wrap="square" lIns="0" tIns="0" rIns="0" bIns="0" rtlCol="0" anchor="ctr"/>
           <a:lstStyle/>
           <a:p>
             <a:pPr algn="ctr" indent="0" marL="0">
               <a:buNone/>
             </a:pPr>
             <a:r>
-              <a:rPr lang="en-US" sz="1250" dirty="0">
-                <a:solidFill>
-                  <a:srgbClr val="6B7280"/>
-                </a:solidFill>
-                <a:latin typeface="Meiryo" pitchFamily="34" charset="0"/>
-                <a:ea typeface="Meiryo" pitchFamily="34" charset="-122"/>
-                <a:cs typeface="Meiryo" pitchFamily="34" charset="-120"/>
-              </a:rPr>
-              <a:t>紙をやめ即入力</a:t>
-            </a:r>
-            <a:endParaRPr lang="en-US" sz="1250" dirty="0"/>
-          </a:p>
-        </p:txBody>
-      </p:sp>
-      <p:sp>
-        <p:nvSpPr>
-          <p:cNvPr id="9" name="Text 7"/>
-          <p:cNvSpPr/>
-          <p:nvPr/>
-        </p:nvSpPr>
-        <p:spPr>
-          <a:xfrm>
-            <a:off x="2295144" y="3108960"/>
-            <a:ext cx="155448" cy="365760"/>
-          </a:xfrm>
-          <a:prstGeom prst="rect">
-            <a:avLst/>
-          </a:prstGeom>
-          <a:noFill/>
-          <a:ln/>
-        </p:spPr>
-        <p:txBody>
-          <a:bodyPr wrap="square" lIns="0" tIns="0" rIns="0" bIns="0" rtlCol="0" anchor="ctr"/>
-          <a:lstStyle/>
-          <a:p>
-            <a:pPr algn="ctr" indent="0" marL="0">
-              <a:buNone/>
-            </a:pPr>
-            <a:r>
               <a:rPr lang="en-US" sz="1100" dirty="0">
                 <a:solidFill>
                   <a:srgbClr val="CADCFC"/>
@@ -10688,14 +11315,14 @@
       </p:sp>
       <p:sp>
         <p:nvSpPr>
-          <p:cNvPr id="10" name="Shape 8"/>
-          <p:cNvSpPr/>
-          <p:nvPr/>
-        </p:nvSpPr>
-        <p:spPr>
-          <a:xfrm>
-            <a:off x="2432304" y="1828800"/>
-            <a:ext cx="1673352" cy="3566160"/>
+          <p:cNvPr id="12" name="Shape 10"/>
+          <p:cNvSpPr/>
+          <p:nvPr/>
+        </p:nvSpPr>
+        <p:spPr>
+          <a:xfrm>
+            <a:off x="2432304" y="1874520"/>
+            <a:ext cx="1673352" cy="3200400"/>
           </a:xfrm>
           <a:prstGeom prst="roundRect">
             <a:avLst>
@@ -10715,14 +11342,14 @@
       </p:sp>
       <p:sp>
         <p:nvSpPr>
-          <p:cNvPr id="11" name="Text 9"/>
-          <p:cNvSpPr/>
-          <p:nvPr/>
-        </p:nvSpPr>
-        <p:spPr>
-          <a:xfrm>
-            <a:off x="3012948" y="2057400"/>
-            <a:ext cx="512064" cy="512064"/>
+          <p:cNvPr id="13" name="Text 11"/>
+          <p:cNvSpPr/>
+          <p:nvPr/>
+        </p:nvSpPr>
+        <p:spPr>
+          <a:xfrm>
+            <a:off x="3022092" y="2075688"/>
+            <a:ext cx="493776" cy="493776"/>
           </a:xfrm>
           <a:prstGeom prst="ellipse">
             <a:avLst/>
@@ -10756,14 +11383,14 @@
       </p:sp>
       <p:sp>
         <p:nvSpPr>
-          <p:cNvPr id="12" name="Text 10"/>
-          <p:cNvSpPr/>
-          <p:nvPr/>
-        </p:nvSpPr>
-        <p:spPr>
-          <a:xfrm>
-            <a:off x="2432304" y="2697480"/>
-            <a:ext cx="1673352" cy="365760"/>
+          <p:cNvPr id="14" name="Text 12"/>
+          <p:cNvSpPr/>
+          <p:nvPr/>
+        </p:nvSpPr>
+        <p:spPr>
+          <a:xfrm>
+            <a:off x="2432304" y="2651760"/>
+            <a:ext cx="1673352" cy="347472"/>
           </a:xfrm>
           <a:prstGeom prst="rect">
             <a:avLst/>
@@ -10779,7 +11406,7 @@
               <a:buNone/>
             </a:pPr>
             <a:r>
-              <a:rPr lang="en-US" sz="1600" b="1" dirty="0">
+              <a:rPr lang="en-US" sz="1500" b="1" dirty="0">
                 <a:solidFill>
                   <a:srgbClr val="2A2E45"/>
                 </a:solidFill>
@@ -10789,20 +11416,20 @@
               </a:rPr>
               <a:t>受注</a:t>
             </a:r>
-            <a:endParaRPr lang="en-US" sz="1600" dirty="0"/>
-          </a:p>
-        </p:txBody>
-      </p:sp>
-      <p:sp>
-        <p:nvSpPr>
-          <p:cNvPr id="13" name="Text 11"/>
-          <p:cNvSpPr/>
-          <p:nvPr/>
-        </p:nvSpPr>
-        <p:spPr>
-          <a:xfrm>
-            <a:off x="2432304" y="3108960"/>
-            <a:ext cx="1673352" cy="274320"/>
+            <a:endParaRPr lang="en-US" sz="1500" dirty="0"/>
+          </a:p>
+        </p:txBody>
+      </p:sp>
+      <p:sp>
+        <p:nvSpPr>
+          <p:cNvPr id="15" name="Text 13"/>
+          <p:cNvSpPr/>
+          <p:nvPr/>
+        </p:nvSpPr>
+        <p:spPr>
+          <a:xfrm>
+            <a:off x="2505456" y="3044952"/>
+            <a:ext cx="1527048" cy="274320"/>
           </a:xfrm>
           <a:prstGeom prst="rect">
             <a:avLst/>
@@ -10818,15 +11445,96 @@
               <a:buNone/>
             </a:pPr>
             <a:r>
+              <a:rPr lang="en-US" sz="1050" b="1" dirty="0">
+                <a:solidFill>
+                  <a:srgbClr val="1E2761"/>
+                </a:solidFill>
+                <a:latin typeface="Meiryo" pitchFamily="34" charset="0"/>
+                <a:ea typeface="Meiryo" pitchFamily="34" charset="-122"/>
+                <a:cs typeface="Meiryo" pitchFamily="34" charset="-120"/>
+              </a:rPr>
+              <a:t>受注 / 戻り受注</a:t>
+            </a:r>
+            <a:endParaRPr lang="en-US" sz="1050" dirty="0"/>
+          </a:p>
+        </p:txBody>
+      </p:sp>
+      <p:sp>
+        <p:nvSpPr>
+          <p:cNvPr id="16" name="Text 14"/>
+          <p:cNvSpPr/>
+          <p:nvPr/>
+        </p:nvSpPr>
+        <p:spPr>
+          <a:xfrm>
+            <a:off x="2432304" y="3355848"/>
+            <a:ext cx="1673352" cy="256032"/>
+          </a:xfrm>
+          <a:prstGeom prst="rect">
+            <a:avLst/>
+          </a:prstGeom>
+          <a:noFill/>
+          <a:ln/>
+        </p:spPr>
+        <p:txBody>
+          <a:bodyPr wrap="square" lIns="0" tIns="0" rIns="0" bIns="0" rtlCol="0" anchor="ctr"/>
+          <a:lstStyle/>
+          <a:p>
+            <a:pPr algn="ctr" indent="0" marL="0">
+              <a:buNone/>
+            </a:pPr>
+            <a:r>
+              <a:rPr lang="en-US" sz="1000" dirty="0">
+                <a:solidFill>
+                  <a:srgbClr val="8A93A8"/>
+                </a:solidFill>
+                <a:latin typeface="Meiryo" pitchFamily="34" charset="0"/>
+                <a:ea typeface="Meiryo" pitchFamily="34" charset="-122"/>
+                <a:cs typeface="Meiryo" pitchFamily="34" charset="-120"/>
+              </a:rPr>
+              <a:t>受注担当</a:t>
+            </a:r>
+            <a:endParaRPr lang="en-US" sz="1000" dirty="0"/>
+          </a:p>
+        </p:txBody>
+      </p:sp>
+      <p:sp>
+        <p:nvSpPr>
+          <p:cNvPr id="17" name="Text 15"/>
+          <p:cNvSpPr/>
+          <p:nvPr/>
+        </p:nvSpPr>
+        <p:spPr>
+          <a:xfrm>
+            <a:off x="2542032" y="3703320"/>
+            <a:ext cx="1453896" cy="1188720"/>
+          </a:xfrm>
+          <a:prstGeom prst="rect">
+            <a:avLst/>
+          </a:prstGeom>
+          <a:noFill/>
+          <a:ln/>
+        </p:spPr>
+        <p:txBody>
+          <a:bodyPr wrap="square" lIns="0" tIns="0" rIns="0" bIns="0" rtlCol="0" anchor="t"/>
+          <a:lstStyle/>
+          <a:p>
+            <a:pPr algn="ctr" indent="0" marL="0">
+              <a:lnSpc>
+                <a:spcPct val="105000"/>
+              </a:lnSpc>
+              <a:buNone/>
+            </a:pPr>
+            <a:r>
               <a:rPr lang="en-US" sz="1100" dirty="0">
                 <a:solidFill>
-                  <a:srgbClr val="1E2761"/>
-                </a:solidFill>
-                <a:latin typeface="Meiryo" pitchFamily="34" charset="0"/>
-                <a:ea typeface="Meiryo" pitchFamily="34" charset="-122"/>
-                <a:cs typeface="Meiryo" pitchFamily="34" charset="-120"/>
-              </a:rPr>
-              <a:t>受注</a:t>
+                  <a:srgbClr val="6B7280"/>
+                </a:solidFill>
+                <a:latin typeface="Meiryo" pitchFamily="34" charset="0"/>
+                <a:ea typeface="Meiryo" pitchFamily="34" charset="-122"/>
+                <a:cs typeface="Meiryo" pitchFamily="34" charset="-120"/>
+              </a:rPr>
+              <a:t>OS作成・管理担当アサイン</a:t>
             </a:r>
             <a:endParaRPr lang="en-US" sz="1100" dirty="0"/>
           </a:p>
@@ -10834,68 +11542,29 @@
       </p:sp>
       <p:sp>
         <p:nvSpPr>
-          <p:cNvPr id="14" name="Text 12"/>
-          <p:cNvSpPr/>
-          <p:nvPr/>
-        </p:nvSpPr>
-        <p:spPr>
-          <a:xfrm>
-            <a:off x="2542032" y="3520440"/>
-            <a:ext cx="1453896" cy="1645920"/>
-          </a:xfrm>
-          <a:prstGeom prst="rect">
-            <a:avLst/>
-          </a:prstGeom>
-          <a:noFill/>
-          <a:ln/>
-        </p:spPr>
-        <p:txBody>
-          <a:bodyPr wrap="square" lIns="0" tIns="0" rIns="0" bIns="0" rtlCol="0" anchor="t"/>
+          <p:cNvPr id="18" name="Text 16"/>
+          <p:cNvSpPr/>
+          <p:nvPr/>
+        </p:nvSpPr>
+        <p:spPr>
+          <a:xfrm>
+            <a:off x="4087368" y="2788920"/>
+            <a:ext cx="155448" cy="365760"/>
+          </a:xfrm>
+          <a:prstGeom prst="rect">
+            <a:avLst/>
+          </a:prstGeom>
+          <a:noFill/>
+          <a:ln/>
+        </p:spPr>
+        <p:txBody>
+          <a:bodyPr wrap="square" lIns="0" tIns="0" rIns="0" bIns="0" rtlCol="0" anchor="ctr"/>
           <a:lstStyle/>
           <a:p>
             <a:pPr algn="ctr" indent="0" marL="0">
               <a:buNone/>
             </a:pPr>
             <a:r>
-              <a:rPr lang="en-US" sz="1250" dirty="0">
-                <a:solidFill>
-                  <a:srgbClr val="6B7280"/>
-                </a:solidFill>
-                <a:latin typeface="Meiryo" pitchFamily="34" charset="0"/>
-                <a:ea typeface="Meiryo" pitchFamily="34" charset="-122"/>
-                <a:cs typeface="Meiryo" pitchFamily="34" charset="-120"/>
-              </a:rPr>
-              <a:t>即アサインで体制</a:t>
-            </a:r>
-            <a:endParaRPr lang="en-US" sz="1250" dirty="0"/>
-          </a:p>
-        </p:txBody>
-      </p:sp>
-      <p:sp>
-        <p:nvSpPr>
-          <p:cNvPr id="15" name="Text 13"/>
-          <p:cNvSpPr/>
-          <p:nvPr/>
-        </p:nvSpPr>
-        <p:spPr>
-          <a:xfrm>
-            <a:off x="4087368" y="3108960"/>
-            <a:ext cx="155448" cy="365760"/>
-          </a:xfrm>
-          <a:prstGeom prst="rect">
-            <a:avLst/>
-          </a:prstGeom>
-          <a:noFill/>
-          <a:ln/>
-        </p:spPr>
-        <p:txBody>
-          <a:bodyPr wrap="square" lIns="0" tIns="0" rIns="0" bIns="0" rtlCol="0" anchor="ctr"/>
-          <a:lstStyle/>
-          <a:p>
-            <a:pPr algn="ctr" indent="0" marL="0">
-              <a:buNone/>
-            </a:pPr>
-            <a:r>
               <a:rPr lang="en-US" sz="1100" dirty="0">
                 <a:solidFill>
                   <a:srgbClr val="CADCFC"/>
@@ -10912,14 +11581,14 @@
       </p:sp>
       <p:sp>
         <p:nvSpPr>
-          <p:cNvPr id="16" name="Shape 14"/>
-          <p:cNvSpPr/>
-          <p:nvPr/>
-        </p:nvSpPr>
-        <p:spPr>
-          <a:xfrm>
-            <a:off x="4224528" y="1828800"/>
-            <a:ext cx="1673352" cy="3566160"/>
+          <p:cNvPr id="19" name="Shape 17"/>
+          <p:cNvSpPr/>
+          <p:nvPr/>
+        </p:nvSpPr>
+        <p:spPr>
+          <a:xfrm>
+            <a:off x="4224528" y="1874520"/>
+            <a:ext cx="1673352" cy="3200400"/>
           </a:xfrm>
           <a:prstGeom prst="roundRect">
             <a:avLst>
@@ -10939,14 +11608,14 @@
       </p:sp>
       <p:sp>
         <p:nvSpPr>
-          <p:cNvPr id="17" name="Text 15"/>
-          <p:cNvSpPr/>
-          <p:nvPr/>
-        </p:nvSpPr>
-        <p:spPr>
-          <a:xfrm>
-            <a:off x="4805172" y="2057400"/>
-            <a:ext cx="512064" cy="512064"/>
+          <p:cNvPr id="20" name="Text 18"/>
+          <p:cNvSpPr/>
+          <p:nvPr/>
+        </p:nvSpPr>
+        <p:spPr>
+          <a:xfrm>
+            <a:off x="4814316" y="2075688"/>
+            <a:ext cx="493776" cy="493776"/>
           </a:xfrm>
           <a:prstGeom prst="ellipse">
             <a:avLst/>
@@ -10980,14 +11649,14 @@
       </p:sp>
       <p:sp>
         <p:nvSpPr>
-          <p:cNvPr id="18" name="Text 16"/>
-          <p:cNvSpPr/>
-          <p:nvPr/>
-        </p:nvSpPr>
-        <p:spPr>
-          <a:xfrm>
-            <a:off x="4224528" y="2697480"/>
-            <a:ext cx="1673352" cy="365760"/>
+          <p:cNvPr id="21" name="Text 19"/>
+          <p:cNvSpPr/>
+          <p:nvPr/>
+        </p:nvSpPr>
+        <p:spPr>
+          <a:xfrm>
+            <a:off x="4224528" y="2651760"/>
+            <a:ext cx="1673352" cy="347472"/>
           </a:xfrm>
           <a:prstGeom prst="rect">
             <a:avLst/>
@@ -11003,7 +11672,7 @@
               <a:buNone/>
             </a:pPr>
             <a:r>
-              <a:rPr lang="en-US" sz="1600" b="1" dirty="0">
+              <a:rPr lang="en-US" sz="1500" b="1" dirty="0">
                 <a:solidFill>
                   <a:srgbClr val="2A2E45"/>
                 </a:solidFill>
@@ -11013,20 +11682,20 @@
               </a:rPr>
               <a:t>着手準備</a:t>
             </a:r>
-            <a:endParaRPr lang="en-US" sz="1600" dirty="0"/>
-          </a:p>
-        </p:txBody>
-      </p:sp>
-      <p:sp>
-        <p:nvSpPr>
-          <p:cNvPr id="19" name="Text 17"/>
-          <p:cNvSpPr/>
-          <p:nvPr/>
-        </p:nvSpPr>
-        <p:spPr>
-          <a:xfrm>
-            <a:off x="4224528" y="3108960"/>
-            <a:ext cx="1673352" cy="274320"/>
+            <a:endParaRPr lang="en-US" sz="1500" dirty="0"/>
+          </a:p>
+        </p:txBody>
+      </p:sp>
+      <p:sp>
+        <p:nvSpPr>
+          <p:cNvPr id="22" name="Text 20"/>
+          <p:cNvSpPr/>
+          <p:nvPr/>
+        </p:nvSpPr>
+        <p:spPr>
+          <a:xfrm>
+            <a:off x="4297680" y="3044952"/>
+            <a:ext cx="1527048" cy="274320"/>
           </a:xfrm>
           <a:prstGeom prst="rect">
             <a:avLst/>
@@ -11042,15 +11711,96 @@
               <a:buNone/>
             </a:pPr>
             <a:r>
+              <a:rPr lang="en-US" sz="1050" b="1" dirty="0">
+                <a:solidFill>
+                  <a:srgbClr val="1E2761"/>
+                </a:solidFill>
+                <a:latin typeface="Meiryo" pitchFamily="34" charset="0"/>
+                <a:ea typeface="Meiryo" pitchFamily="34" charset="-122"/>
+                <a:cs typeface="Meiryo" pitchFamily="34" charset="-120"/>
+              </a:rPr>
+              <a:t>作業着手準備</a:t>
+            </a:r>
+            <a:endParaRPr lang="en-US" sz="1050" dirty="0"/>
+          </a:p>
+        </p:txBody>
+      </p:sp>
+      <p:sp>
+        <p:nvSpPr>
+          <p:cNvPr id="23" name="Text 21"/>
+          <p:cNvSpPr/>
+          <p:nvPr/>
+        </p:nvSpPr>
+        <p:spPr>
+          <a:xfrm>
+            <a:off x="4224528" y="3355848"/>
+            <a:ext cx="1673352" cy="256032"/>
+          </a:xfrm>
+          <a:prstGeom prst="rect">
+            <a:avLst/>
+          </a:prstGeom>
+          <a:noFill/>
+          <a:ln/>
+        </p:spPr>
+        <p:txBody>
+          <a:bodyPr wrap="square" lIns="0" tIns="0" rIns="0" bIns="0" rtlCol="0" anchor="ctr"/>
+          <a:lstStyle/>
+          <a:p>
+            <a:pPr algn="ctr" indent="0" marL="0">
+              <a:buNone/>
+            </a:pPr>
+            <a:r>
+              <a:rPr lang="en-US" sz="1000" dirty="0">
+                <a:solidFill>
+                  <a:srgbClr val="8A93A8"/>
+                </a:solidFill>
+                <a:latin typeface="Meiryo" pitchFamily="34" charset="0"/>
+                <a:ea typeface="Meiryo" pitchFamily="34" charset="-122"/>
+                <a:cs typeface="Meiryo" pitchFamily="34" charset="-120"/>
+              </a:rPr>
+              <a:t>管理・事務</a:t>
+            </a:r>
+            <a:endParaRPr lang="en-US" sz="1000" dirty="0"/>
+          </a:p>
+        </p:txBody>
+      </p:sp>
+      <p:sp>
+        <p:nvSpPr>
+          <p:cNvPr id="24" name="Text 22"/>
+          <p:cNvSpPr/>
+          <p:nvPr/>
+        </p:nvSpPr>
+        <p:spPr>
+          <a:xfrm>
+            <a:off x="4334256" y="3703320"/>
+            <a:ext cx="1453896" cy="1188720"/>
+          </a:xfrm>
+          <a:prstGeom prst="rect">
+            <a:avLst/>
+          </a:prstGeom>
+          <a:noFill/>
+          <a:ln/>
+        </p:spPr>
+        <p:txBody>
+          <a:bodyPr wrap="square" lIns="0" tIns="0" rIns="0" bIns="0" rtlCol="0" anchor="t"/>
+          <a:lstStyle/>
+          <a:p>
+            <a:pPr algn="ctr" indent="0" marL="0">
+              <a:lnSpc>
+                <a:spcPct val="105000"/>
+              </a:lnSpc>
+              <a:buNone/>
+            </a:pPr>
+            <a:r>
               <a:rPr lang="en-US" sz="1100" dirty="0">
                 <a:solidFill>
-                  <a:srgbClr val="1E2761"/>
-                </a:solidFill>
-                <a:latin typeface="Meiryo" pitchFamily="34" charset="0"/>
-                <a:ea typeface="Meiryo" pitchFamily="34" charset="-122"/>
-                <a:cs typeface="Meiryo" pitchFamily="34" charset="-120"/>
-              </a:rPr>
-              <a:t>管理・事務</a:t>
+                  <a:srgbClr val="6B7280"/>
+                </a:solidFill>
+                <a:latin typeface="Meiryo" pitchFamily="34" charset="0"/>
+                <a:ea typeface="Meiryo" pitchFamily="34" charset="-122"/>
+                <a:cs typeface="Meiryo" pitchFamily="34" charset="-120"/>
+              </a:rPr>
+              <a:t>契約書類/前受金/ファイル化</a:t>
             </a:r>
             <a:endParaRPr lang="en-US" sz="1100" dirty="0"/>
           </a:p>
@@ -11058,68 +11808,29 @@
       </p:sp>
       <p:sp>
         <p:nvSpPr>
-          <p:cNvPr id="20" name="Text 18"/>
-          <p:cNvSpPr/>
-          <p:nvPr/>
-        </p:nvSpPr>
-        <p:spPr>
-          <a:xfrm>
-            <a:off x="4334256" y="3520440"/>
-            <a:ext cx="1453896" cy="1645920"/>
-          </a:xfrm>
-          <a:prstGeom prst="rect">
-            <a:avLst/>
-          </a:prstGeom>
-          <a:noFill/>
-          <a:ln/>
-        </p:spPr>
-        <p:txBody>
-          <a:bodyPr wrap="square" lIns="0" tIns="0" rIns="0" bIns="0" rtlCol="0" anchor="t"/>
+          <p:cNvPr id="25" name="Text 23"/>
+          <p:cNvSpPr/>
+          <p:nvPr/>
+        </p:nvSpPr>
+        <p:spPr>
+          <a:xfrm>
+            <a:off x="5879592" y="2788920"/>
+            <a:ext cx="155448" cy="365760"/>
+          </a:xfrm>
+          <a:prstGeom prst="rect">
+            <a:avLst/>
+          </a:prstGeom>
+          <a:noFill/>
+          <a:ln/>
+        </p:spPr>
+        <p:txBody>
+          <a:bodyPr wrap="square" lIns="0" tIns="0" rIns="0" bIns="0" rtlCol="0" anchor="ctr"/>
           <a:lstStyle/>
           <a:p>
             <a:pPr algn="ctr" indent="0" marL="0">
               <a:buNone/>
             </a:pPr>
             <a:r>
-              <a:rPr lang="en-US" sz="1250" dirty="0">
-                <a:solidFill>
-                  <a:srgbClr val="6B7280"/>
-                </a:solidFill>
-                <a:latin typeface="Meiryo" pitchFamily="34" charset="0"/>
-                <a:ea typeface="Meiryo" pitchFamily="34" charset="-122"/>
-                <a:cs typeface="Meiryo" pitchFamily="34" charset="-120"/>
-              </a:rPr>
-              <a:t>揃って着手</a:t>
-            </a:r>
-            <a:endParaRPr lang="en-US" sz="1250" dirty="0"/>
-          </a:p>
-        </p:txBody>
-      </p:sp>
-      <p:sp>
-        <p:nvSpPr>
-          <p:cNvPr id="21" name="Text 19"/>
-          <p:cNvSpPr/>
-          <p:nvPr/>
-        </p:nvSpPr>
-        <p:spPr>
-          <a:xfrm>
-            <a:off x="5879592" y="3108960"/>
-            <a:ext cx="155448" cy="365760"/>
-          </a:xfrm>
-          <a:prstGeom prst="rect">
-            <a:avLst/>
-          </a:prstGeom>
-          <a:noFill/>
-          <a:ln/>
-        </p:spPr>
-        <p:txBody>
-          <a:bodyPr wrap="square" lIns="0" tIns="0" rIns="0" bIns="0" rtlCol="0" anchor="ctr"/>
-          <a:lstStyle/>
-          <a:p>
-            <a:pPr algn="ctr" indent="0" marL="0">
-              <a:buNone/>
-            </a:pPr>
-            <a:r>
               <a:rPr lang="en-US" sz="1100" dirty="0">
                 <a:solidFill>
                   <a:srgbClr val="CADCFC"/>
@@ -11136,14 +11847,14 @@
       </p:sp>
       <p:sp>
         <p:nvSpPr>
-          <p:cNvPr id="22" name="Shape 20"/>
-          <p:cNvSpPr/>
-          <p:nvPr/>
-        </p:nvSpPr>
-        <p:spPr>
-          <a:xfrm>
-            <a:off x="6016752" y="1828800"/>
-            <a:ext cx="1673352" cy="3566160"/>
+          <p:cNvPr id="26" name="Shape 24"/>
+          <p:cNvSpPr/>
+          <p:nvPr/>
+        </p:nvSpPr>
+        <p:spPr>
+          <a:xfrm>
+            <a:off x="6016752" y="1874520"/>
+            <a:ext cx="1673352" cy="3200400"/>
           </a:xfrm>
           <a:prstGeom prst="roundRect">
             <a:avLst>
@@ -11163,14 +11874,14 @@
       </p:sp>
       <p:sp>
         <p:nvSpPr>
-          <p:cNvPr id="23" name="Text 21"/>
-          <p:cNvSpPr/>
-          <p:nvPr/>
-        </p:nvSpPr>
-        <p:spPr>
-          <a:xfrm>
-            <a:off x="6597396" y="2057400"/>
-            <a:ext cx="512064" cy="512064"/>
+          <p:cNvPr id="27" name="Text 25"/>
+          <p:cNvSpPr/>
+          <p:nvPr/>
+        </p:nvSpPr>
+        <p:spPr>
+          <a:xfrm>
+            <a:off x="6606540" y="2075688"/>
+            <a:ext cx="493776" cy="493776"/>
           </a:xfrm>
           <a:prstGeom prst="ellipse">
             <a:avLst/>
@@ -11204,14 +11915,14 @@
       </p:sp>
       <p:sp>
         <p:nvSpPr>
-          <p:cNvPr id="24" name="Text 22"/>
-          <p:cNvSpPr/>
-          <p:nvPr/>
-        </p:nvSpPr>
-        <p:spPr>
-          <a:xfrm>
-            <a:off x="6016752" y="2697480"/>
-            <a:ext cx="1673352" cy="365760"/>
+          <p:cNvPr id="28" name="Text 26"/>
+          <p:cNvSpPr/>
+          <p:nvPr/>
+        </p:nvSpPr>
+        <p:spPr>
+          <a:xfrm>
+            <a:off x="6016752" y="2651760"/>
+            <a:ext cx="1673352" cy="347472"/>
           </a:xfrm>
           <a:prstGeom prst="rect">
             <a:avLst/>
@@ -11227,7 +11938,7 @@
               <a:buNone/>
             </a:pPr>
             <a:r>
-              <a:rPr lang="en-US" sz="1600" b="1" dirty="0">
+              <a:rPr lang="en-US" sz="1500" b="1" dirty="0">
                 <a:solidFill>
                   <a:srgbClr val="2A2E45"/>
                 </a:solidFill>
@@ -11237,20 +11948,20 @@
               </a:rPr>
               <a:t>対応中</a:t>
             </a:r>
-            <a:endParaRPr lang="en-US" sz="1600" dirty="0"/>
-          </a:p>
-        </p:txBody>
-      </p:sp>
-      <p:sp>
-        <p:nvSpPr>
-          <p:cNvPr id="25" name="Text 23"/>
-          <p:cNvSpPr/>
-          <p:nvPr/>
-        </p:nvSpPr>
-        <p:spPr>
-          <a:xfrm>
-            <a:off x="6016752" y="3108960"/>
-            <a:ext cx="1673352" cy="274320"/>
+            <a:endParaRPr lang="en-US" sz="1500" dirty="0"/>
+          </a:p>
+        </p:txBody>
+      </p:sp>
+      <p:sp>
+        <p:nvSpPr>
+          <p:cNvPr id="29" name="Text 27"/>
+          <p:cNvSpPr/>
+          <p:nvPr/>
+        </p:nvSpPr>
+        <p:spPr>
+          <a:xfrm>
+            <a:off x="6089904" y="3044952"/>
+            <a:ext cx="1527048" cy="274320"/>
           </a:xfrm>
           <a:prstGeom prst="rect">
             <a:avLst/>
@@ -11266,15 +11977,96 @@
               <a:buNone/>
             </a:pPr>
             <a:r>
+              <a:rPr lang="en-US" sz="1050" b="1" dirty="0">
+                <a:solidFill>
+                  <a:srgbClr val="1E2761"/>
+                </a:solidFill>
+                <a:latin typeface="Meiryo" pitchFamily="34" charset="0"/>
+                <a:ea typeface="Meiryo" pitchFamily="34" charset="-122"/>
+                <a:cs typeface="Meiryo" pitchFamily="34" charset="-120"/>
+              </a:rPr>
+              <a:t>対応中</a:t>
+            </a:r>
+            <a:endParaRPr lang="en-US" sz="1050" dirty="0"/>
+          </a:p>
+        </p:txBody>
+      </p:sp>
+      <p:sp>
+        <p:nvSpPr>
+          <p:cNvPr id="30" name="Text 28"/>
+          <p:cNvSpPr/>
+          <p:nvPr/>
+        </p:nvSpPr>
+        <p:spPr>
+          <a:xfrm>
+            <a:off x="6016752" y="3355848"/>
+            <a:ext cx="1673352" cy="256032"/>
+          </a:xfrm>
+          <a:prstGeom prst="rect">
+            <a:avLst/>
+          </a:prstGeom>
+          <a:noFill/>
+          <a:ln/>
+        </p:spPr>
+        <p:txBody>
+          <a:bodyPr wrap="square" lIns="0" tIns="0" rIns="0" bIns="0" rtlCol="0" anchor="ctr"/>
+          <a:lstStyle/>
+          <a:p>
+            <a:pPr algn="ctr" indent="0" marL="0">
+              <a:buNone/>
+            </a:pPr>
+            <a:r>
+              <a:rPr lang="en-US" sz="1000" dirty="0">
+                <a:solidFill>
+                  <a:srgbClr val="8A93A8"/>
+                </a:solidFill>
+                <a:latin typeface="Meiryo" pitchFamily="34" charset="0"/>
+                <a:ea typeface="Meiryo" pitchFamily="34" charset="-122"/>
+                <a:cs typeface="Meiryo" pitchFamily="34" charset="-120"/>
+              </a:rPr>
+              <a:t>管理担当</a:t>
+            </a:r>
+            <a:endParaRPr lang="en-US" sz="1000" dirty="0"/>
+          </a:p>
+        </p:txBody>
+      </p:sp>
+      <p:sp>
+        <p:nvSpPr>
+          <p:cNvPr id="31" name="Text 29"/>
+          <p:cNvSpPr/>
+          <p:nvPr/>
+        </p:nvSpPr>
+        <p:spPr>
+          <a:xfrm>
+            <a:off x="6126480" y="3703320"/>
+            <a:ext cx="1453896" cy="1188720"/>
+          </a:xfrm>
+          <a:prstGeom prst="rect">
+            <a:avLst/>
+          </a:prstGeom>
+          <a:noFill/>
+          <a:ln/>
+        </p:spPr>
+        <p:txBody>
+          <a:bodyPr wrap="square" lIns="0" tIns="0" rIns="0" bIns="0" rtlCol="0" anchor="t"/>
+          <a:lstStyle/>
+          <a:p>
+            <a:pPr algn="ctr" indent="0" marL="0">
+              <a:lnSpc>
+                <a:spcPct val="105000"/>
+              </a:lnSpc>
+              <a:buNone/>
+            </a:pPr>
+            <a:r>
               <a:rPr lang="en-US" sz="1100" dirty="0">
                 <a:solidFill>
-                  <a:srgbClr val="1E2761"/>
-                </a:solidFill>
-                <a:latin typeface="Meiryo" pitchFamily="34" charset="0"/>
-                <a:ea typeface="Meiryo" pitchFamily="34" charset="-122"/>
-                <a:cs typeface="Meiryo" pitchFamily="34" charset="-120"/>
-              </a:rPr>
-              <a:t>管理</a:t>
+                  <a:srgbClr val="6B7280"/>
+                </a:solidFill>
+                <a:latin typeface="Meiryo" pitchFamily="34" charset="0"/>
+                <a:ea typeface="Meiryo" pitchFamily="34" charset="-122"/>
+                <a:cs typeface="Meiryo" pitchFamily="34" charset="-120"/>
+              </a:rPr>
+              <a:t>財産調査・目録・請求</a:t>
             </a:r>
             <a:endParaRPr lang="en-US" sz="1100" dirty="0"/>
           </a:p>
@@ -11282,68 +12074,29 @@
       </p:sp>
       <p:sp>
         <p:nvSpPr>
-          <p:cNvPr id="26" name="Text 24"/>
-          <p:cNvSpPr/>
-          <p:nvPr/>
-        </p:nvSpPr>
-        <p:spPr>
-          <a:xfrm>
-            <a:off x="6126480" y="3520440"/>
-            <a:ext cx="1453896" cy="1645920"/>
-          </a:xfrm>
-          <a:prstGeom prst="rect">
-            <a:avLst/>
-          </a:prstGeom>
-          <a:noFill/>
-          <a:ln/>
-        </p:spPr>
-        <p:txBody>
-          <a:bodyPr wrap="square" lIns="0" tIns="0" rIns="0" bIns="0" rtlCol="0" anchor="t"/>
+          <p:cNvPr id="32" name="Text 30"/>
+          <p:cNvSpPr/>
+          <p:nvPr/>
+        </p:nvSpPr>
+        <p:spPr>
+          <a:xfrm>
+            <a:off x="7671816" y="2788920"/>
+            <a:ext cx="155448" cy="365760"/>
+          </a:xfrm>
+          <a:prstGeom prst="rect">
+            <a:avLst/>
+          </a:prstGeom>
+          <a:noFill/>
+          <a:ln/>
+        </p:spPr>
+        <p:txBody>
+          <a:bodyPr wrap="square" lIns="0" tIns="0" rIns="0" bIns="0" rtlCol="0" anchor="ctr"/>
           <a:lstStyle/>
           <a:p>
             <a:pPr algn="ctr" indent="0" marL="0">
               <a:buNone/>
             </a:pPr>
             <a:r>
-              <a:rPr lang="en-US" sz="1250" dirty="0">
-                <a:solidFill>
-                  <a:srgbClr val="6B7280"/>
-                </a:solidFill>
-                <a:latin typeface="Meiryo" pitchFamily="34" charset="0"/>
-                <a:ea typeface="Meiryo" pitchFamily="34" charset="-122"/>
-                <a:cs typeface="Meiryo" pitchFamily="34" charset="-120"/>
-              </a:rPr>
-              <a:t>AIサマリーで把握</a:t>
-            </a:r>
-            <a:endParaRPr lang="en-US" sz="1250" dirty="0"/>
-          </a:p>
-        </p:txBody>
-      </p:sp>
-      <p:sp>
-        <p:nvSpPr>
-          <p:cNvPr id="27" name="Text 25"/>
-          <p:cNvSpPr/>
-          <p:nvPr/>
-        </p:nvSpPr>
-        <p:spPr>
-          <a:xfrm>
-            <a:off x="7671816" y="3108960"/>
-            <a:ext cx="155448" cy="365760"/>
-          </a:xfrm>
-          <a:prstGeom prst="rect">
-            <a:avLst/>
-          </a:prstGeom>
-          <a:noFill/>
-          <a:ln/>
-        </p:spPr>
-        <p:txBody>
-          <a:bodyPr wrap="square" lIns="0" tIns="0" rIns="0" bIns="0" rtlCol="0" anchor="ctr"/>
-          <a:lstStyle/>
-          <a:p>
-            <a:pPr algn="ctr" indent="0" marL="0">
-              <a:buNone/>
-            </a:pPr>
-            <a:r>
               <a:rPr lang="en-US" sz="1100" dirty="0">
                 <a:solidFill>
                   <a:srgbClr val="CADCFC"/>
@@ -11360,14 +12113,14 @@
       </p:sp>
       <p:sp>
         <p:nvSpPr>
-          <p:cNvPr id="28" name="Shape 26"/>
-          <p:cNvSpPr/>
-          <p:nvPr/>
-        </p:nvSpPr>
-        <p:spPr>
-          <a:xfrm>
-            <a:off x="7808976" y="1828800"/>
-            <a:ext cx="1673352" cy="3566160"/>
+          <p:cNvPr id="33" name="Shape 31"/>
+          <p:cNvSpPr/>
+          <p:nvPr/>
+        </p:nvSpPr>
+        <p:spPr>
+          <a:xfrm>
+            <a:off x="7808976" y="1874520"/>
+            <a:ext cx="1673352" cy="3200400"/>
           </a:xfrm>
           <a:prstGeom prst="roundRect">
             <a:avLst>
@@ -11387,14 +12140,14 @@
       </p:sp>
       <p:sp>
         <p:nvSpPr>
-          <p:cNvPr id="29" name="Text 27"/>
-          <p:cNvSpPr/>
-          <p:nvPr/>
-        </p:nvSpPr>
-        <p:spPr>
-          <a:xfrm>
-            <a:off x="8389620" y="2057400"/>
-            <a:ext cx="512064" cy="512064"/>
+          <p:cNvPr id="34" name="Text 32"/>
+          <p:cNvSpPr/>
+          <p:nvPr/>
+        </p:nvSpPr>
+        <p:spPr>
+          <a:xfrm>
+            <a:off x="8398764" y="2075688"/>
+            <a:ext cx="493776" cy="493776"/>
           </a:xfrm>
           <a:prstGeom prst="ellipse">
             <a:avLst/>
@@ -11428,14 +12181,14 @@
       </p:sp>
       <p:sp>
         <p:nvSpPr>
-          <p:cNvPr id="30" name="Text 28"/>
-          <p:cNvSpPr/>
-          <p:nvPr/>
-        </p:nvSpPr>
-        <p:spPr>
-          <a:xfrm>
-            <a:off x="7808976" y="2697480"/>
-            <a:ext cx="1673352" cy="365760"/>
+          <p:cNvPr id="35" name="Text 33"/>
+          <p:cNvSpPr/>
+          <p:nvPr/>
+        </p:nvSpPr>
+        <p:spPr>
+          <a:xfrm>
+            <a:off x="7808976" y="2651760"/>
+            <a:ext cx="1673352" cy="347472"/>
           </a:xfrm>
           <a:prstGeom prst="rect">
             <a:avLst/>
@@ -11451,7 +12204,7 @@
               <a:buNone/>
             </a:pPr>
             <a:r>
-              <a:rPr lang="en-US" sz="1600" b="1" dirty="0">
+              <a:rPr lang="en-US" sz="1500" b="1" dirty="0">
                 <a:solidFill>
                   <a:srgbClr val="2A2E45"/>
                 </a:solidFill>
@@ -11461,20 +12214,20 @@
               </a:rPr>
               <a:t>業務完了</a:t>
             </a:r>
-            <a:endParaRPr lang="en-US" sz="1600" dirty="0"/>
-          </a:p>
-        </p:txBody>
-      </p:sp>
-      <p:sp>
-        <p:nvSpPr>
-          <p:cNvPr id="31" name="Text 29"/>
-          <p:cNvSpPr/>
-          <p:nvPr/>
-        </p:nvSpPr>
-        <p:spPr>
-          <a:xfrm>
-            <a:off x="7808976" y="3108960"/>
-            <a:ext cx="1673352" cy="274320"/>
+            <a:endParaRPr lang="en-US" sz="1500" dirty="0"/>
+          </a:p>
+        </p:txBody>
+      </p:sp>
+      <p:sp>
+        <p:nvSpPr>
+          <p:cNvPr id="36" name="Text 34"/>
+          <p:cNvSpPr/>
+          <p:nvPr/>
+        </p:nvSpPr>
+        <p:spPr>
+          <a:xfrm>
+            <a:off x="7882128" y="3044952"/>
+            <a:ext cx="1527048" cy="274320"/>
           </a:xfrm>
           <a:prstGeom prst="rect">
             <a:avLst/>
@@ -11490,15 +12243,96 @@
               <a:buNone/>
             </a:pPr>
             <a:r>
+              <a:rPr lang="en-US" sz="1050" b="1" dirty="0">
+                <a:solidFill>
+                  <a:srgbClr val="1E2761"/>
+                </a:solidFill>
+                <a:latin typeface="Meiryo" pitchFamily="34" charset="0"/>
+                <a:ea typeface="Meiryo" pitchFamily="34" charset="-122"/>
+                <a:cs typeface="Meiryo" pitchFamily="34" charset="-120"/>
+              </a:rPr>
+              <a:t>業務完了</a:t>
+            </a:r>
+            <a:endParaRPr lang="en-US" sz="1050" dirty="0"/>
+          </a:p>
+        </p:txBody>
+      </p:sp>
+      <p:sp>
+        <p:nvSpPr>
+          <p:cNvPr id="37" name="Text 35"/>
+          <p:cNvSpPr/>
+          <p:nvPr/>
+        </p:nvSpPr>
+        <p:spPr>
+          <a:xfrm>
+            <a:off x="7808976" y="3355848"/>
+            <a:ext cx="1673352" cy="256032"/>
+          </a:xfrm>
+          <a:prstGeom prst="rect">
+            <a:avLst/>
+          </a:prstGeom>
+          <a:noFill/>
+          <a:ln/>
+        </p:spPr>
+        <p:txBody>
+          <a:bodyPr wrap="square" lIns="0" tIns="0" rIns="0" bIns="0" rtlCol="0" anchor="ctr"/>
+          <a:lstStyle/>
+          <a:p>
+            <a:pPr algn="ctr" indent="0" marL="0">
+              <a:buNone/>
+            </a:pPr>
+            <a:r>
+              <a:rPr lang="en-US" sz="1000" dirty="0">
+                <a:solidFill>
+                  <a:srgbClr val="8A93A8"/>
+                </a:solidFill>
+                <a:latin typeface="Meiryo" pitchFamily="34" charset="0"/>
+                <a:ea typeface="Meiryo" pitchFamily="34" charset="-122"/>
+                <a:cs typeface="Meiryo" pitchFamily="34" charset="-120"/>
+              </a:rPr>
+              <a:t>管理担当</a:t>
+            </a:r>
+            <a:endParaRPr lang="en-US" sz="1000" dirty="0"/>
+          </a:p>
+        </p:txBody>
+      </p:sp>
+      <p:sp>
+        <p:nvSpPr>
+          <p:cNvPr id="38" name="Text 36"/>
+          <p:cNvSpPr/>
+          <p:nvPr/>
+        </p:nvSpPr>
+        <p:spPr>
+          <a:xfrm>
+            <a:off x="7918704" y="3703320"/>
+            <a:ext cx="1453896" cy="1188720"/>
+          </a:xfrm>
+          <a:prstGeom prst="rect">
+            <a:avLst/>
+          </a:prstGeom>
+          <a:noFill/>
+          <a:ln/>
+        </p:spPr>
+        <p:txBody>
+          <a:bodyPr wrap="square" lIns="0" tIns="0" rIns="0" bIns="0" rtlCol="0" anchor="t"/>
+          <a:lstStyle/>
+          <a:p>
+            <a:pPr algn="ctr" indent="0" marL="0">
+              <a:lnSpc>
+                <a:spcPct val="105000"/>
+              </a:lnSpc>
+              <a:buNone/>
+            </a:pPr>
+            <a:r>
               <a:rPr lang="en-US" sz="1100" dirty="0">
                 <a:solidFill>
-                  <a:srgbClr val="1E2761"/>
-                </a:solidFill>
-                <a:latin typeface="Meiryo" pitchFamily="34" charset="0"/>
-                <a:ea typeface="Meiryo" pitchFamily="34" charset="-122"/>
-                <a:cs typeface="Meiryo" pitchFamily="34" charset="-120"/>
-              </a:rPr>
-              <a:t>管理</a:t>
+                  <a:srgbClr val="6B7280"/>
+                </a:solidFill>
+                <a:latin typeface="Meiryo" pitchFamily="34" charset="0"/>
+                <a:ea typeface="Meiryo" pitchFamily="34" charset="-122"/>
+                <a:cs typeface="Meiryo" pitchFamily="34" charset="-120"/>
+              </a:rPr>
+              <a:t>全請求発行で完了</a:t>
             </a:r>
             <a:endParaRPr lang="en-US" sz="1100" dirty="0"/>
           </a:p>
@@ -11506,68 +12340,29 @@
       </p:sp>
       <p:sp>
         <p:nvSpPr>
-          <p:cNvPr id="32" name="Text 30"/>
-          <p:cNvSpPr/>
-          <p:nvPr/>
-        </p:nvSpPr>
-        <p:spPr>
-          <a:xfrm>
-            <a:off x="7918704" y="3520440"/>
-            <a:ext cx="1453896" cy="1645920"/>
-          </a:xfrm>
-          <a:prstGeom prst="rect">
-            <a:avLst/>
-          </a:prstGeom>
-          <a:noFill/>
-          <a:ln/>
-        </p:spPr>
-        <p:txBody>
-          <a:bodyPr wrap="square" lIns="0" tIns="0" rIns="0" bIns="0" rtlCol="0" anchor="t"/>
+          <p:cNvPr id="39" name="Text 37"/>
+          <p:cNvSpPr/>
+          <p:nvPr/>
+        </p:nvSpPr>
+        <p:spPr>
+          <a:xfrm>
+            <a:off x="9464040" y="2788920"/>
+            <a:ext cx="155448" cy="365760"/>
+          </a:xfrm>
+          <a:prstGeom prst="rect">
+            <a:avLst/>
+          </a:prstGeom>
+          <a:noFill/>
+          <a:ln/>
+        </p:spPr>
+        <p:txBody>
+          <a:bodyPr wrap="square" lIns="0" tIns="0" rIns="0" bIns="0" rtlCol="0" anchor="ctr"/>
           <a:lstStyle/>
           <a:p>
             <a:pPr algn="ctr" indent="0" marL="0">
               <a:buNone/>
             </a:pPr>
             <a:r>
-              <a:rPr lang="en-US" sz="1250" dirty="0">
-                <a:solidFill>
-                  <a:srgbClr val="6B7280"/>
-                </a:solidFill>
-                <a:latin typeface="Meiryo" pitchFamily="34" charset="0"/>
-                <a:ea typeface="Meiryo" pitchFamily="34" charset="-122"/>
-                <a:cs typeface="Meiryo" pitchFamily="34" charset="-120"/>
-              </a:rPr>
-              <a:t>全請求発行で完了</a:t>
-            </a:r>
-            <a:endParaRPr lang="en-US" sz="1250" dirty="0"/>
-          </a:p>
-        </p:txBody>
-      </p:sp>
-      <p:sp>
-        <p:nvSpPr>
-          <p:cNvPr id="33" name="Text 31"/>
-          <p:cNvSpPr/>
-          <p:nvPr/>
-        </p:nvSpPr>
-        <p:spPr>
-          <a:xfrm>
-            <a:off x="9464040" y="3108960"/>
-            <a:ext cx="155448" cy="365760"/>
-          </a:xfrm>
-          <a:prstGeom prst="rect">
-            <a:avLst/>
-          </a:prstGeom>
-          <a:noFill/>
-          <a:ln/>
-        </p:spPr>
-        <p:txBody>
-          <a:bodyPr wrap="square" lIns="0" tIns="0" rIns="0" bIns="0" rtlCol="0" anchor="ctr"/>
-          <a:lstStyle/>
-          <a:p>
-            <a:pPr algn="ctr" indent="0" marL="0">
-              <a:buNone/>
-            </a:pPr>
-            <a:r>
               <a:rPr lang="en-US" sz="1100" dirty="0">
                 <a:solidFill>
                   <a:srgbClr val="CADCFC"/>
@@ -11584,14 +12379,14 @@
       </p:sp>
       <p:sp>
         <p:nvSpPr>
-          <p:cNvPr id="34" name="Shape 32"/>
-          <p:cNvSpPr/>
-          <p:nvPr/>
-        </p:nvSpPr>
-        <p:spPr>
-          <a:xfrm>
-            <a:off x="9601200" y="1828800"/>
-            <a:ext cx="1673352" cy="3566160"/>
+          <p:cNvPr id="40" name="Shape 38"/>
+          <p:cNvSpPr/>
+          <p:nvPr/>
+        </p:nvSpPr>
+        <p:spPr>
+          <a:xfrm>
+            <a:off x="9601200" y="1874520"/>
+            <a:ext cx="1673352" cy="3200400"/>
           </a:xfrm>
           <a:prstGeom prst="roundRect">
             <a:avLst>
@@ -11611,14 +12406,14 @@
       </p:sp>
       <p:sp>
         <p:nvSpPr>
-          <p:cNvPr id="35" name="Text 33"/>
-          <p:cNvSpPr/>
-          <p:nvPr/>
-        </p:nvSpPr>
-        <p:spPr>
-          <a:xfrm>
-            <a:off x="10181844" y="2057400"/>
-            <a:ext cx="512064" cy="512064"/>
+          <p:cNvPr id="41" name="Text 39"/>
+          <p:cNvSpPr/>
+          <p:nvPr/>
+        </p:nvSpPr>
+        <p:spPr>
+          <a:xfrm>
+            <a:off x="10190988" y="2075688"/>
+            <a:ext cx="493776" cy="493776"/>
           </a:xfrm>
           <a:prstGeom prst="ellipse">
             <a:avLst/>
@@ -11652,14 +12447,14 @@
       </p:sp>
       <p:sp>
         <p:nvSpPr>
-          <p:cNvPr id="36" name="Text 34"/>
-          <p:cNvSpPr/>
-          <p:nvPr/>
-        </p:nvSpPr>
-        <p:spPr>
-          <a:xfrm>
-            <a:off x="9601200" y="2697480"/>
-            <a:ext cx="1673352" cy="365760"/>
+          <p:cNvPr id="42" name="Text 40"/>
+          <p:cNvSpPr/>
+          <p:nvPr/>
+        </p:nvSpPr>
+        <p:spPr>
+          <a:xfrm>
+            <a:off x="9601200" y="2651760"/>
+            <a:ext cx="1673352" cy="347472"/>
           </a:xfrm>
           <a:prstGeom prst="rect">
             <a:avLst/>
@@ -11675,7 +12470,7 @@
               <a:buNone/>
             </a:pPr>
             <a:r>
-              <a:rPr lang="en-US" sz="1600" b="1" dirty="0">
+              <a:rPr lang="en-US" sz="1500" b="1" dirty="0">
                 <a:solidFill>
                   <a:srgbClr val="2A2E45"/>
                 </a:solidFill>
@@ -11685,20 +12480,20 @@
               </a:rPr>
               <a:t>納品</a:t>
             </a:r>
-            <a:endParaRPr lang="en-US" sz="1600" dirty="0"/>
-          </a:p>
-        </p:txBody>
-      </p:sp>
-      <p:sp>
-        <p:nvSpPr>
-          <p:cNvPr id="37" name="Text 35"/>
-          <p:cNvSpPr/>
-          <p:nvPr/>
-        </p:nvSpPr>
-        <p:spPr>
-          <a:xfrm>
-            <a:off x="9601200" y="3108960"/>
-            <a:ext cx="1673352" cy="274320"/>
+            <a:endParaRPr lang="en-US" sz="1500" dirty="0"/>
+          </a:p>
+        </p:txBody>
+      </p:sp>
+      <p:sp>
+        <p:nvSpPr>
+          <p:cNvPr id="43" name="Text 41"/>
+          <p:cNvSpPr/>
+          <p:nvPr/>
+        </p:nvSpPr>
+        <p:spPr>
+          <a:xfrm>
+            <a:off x="9674352" y="3044952"/>
+            <a:ext cx="1527048" cy="274320"/>
           </a:xfrm>
           <a:prstGeom prst="rect">
             <a:avLst/>
@@ -11714,46 +12509,168 @@
               <a:buNone/>
             </a:pPr>
             <a:r>
+              <a:rPr lang="en-US" sz="1050" b="1" dirty="0">
+                <a:solidFill>
+                  <a:srgbClr val="1E2761"/>
+                </a:solidFill>
+                <a:latin typeface="Meiryo" pitchFamily="34" charset="0"/>
+                <a:ea typeface="Meiryo" pitchFamily="34" charset="-122"/>
+                <a:cs typeface="Meiryo" pitchFamily="34" charset="-120"/>
+              </a:rPr>
+              <a:t>納品完了</a:t>
+            </a:r>
+            <a:endParaRPr lang="en-US" sz="1050" dirty="0"/>
+          </a:p>
+        </p:txBody>
+      </p:sp>
+      <p:sp>
+        <p:nvSpPr>
+          <p:cNvPr id="44" name="Text 42"/>
+          <p:cNvSpPr/>
+          <p:nvPr/>
+        </p:nvSpPr>
+        <p:spPr>
+          <a:xfrm>
+            <a:off x="9601200" y="3355848"/>
+            <a:ext cx="1673352" cy="256032"/>
+          </a:xfrm>
+          <a:prstGeom prst="rect">
+            <a:avLst/>
+          </a:prstGeom>
+          <a:noFill/>
+          <a:ln/>
+        </p:spPr>
+        <p:txBody>
+          <a:bodyPr wrap="square" lIns="0" tIns="0" rIns="0" bIns="0" rtlCol="0" anchor="ctr"/>
+          <a:lstStyle/>
+          <a:p>
+            <a:pPr algn="ctr" indent="0" marL="0">
+              <a:buNone/>
+            </a:pPr>
+            <a:r>
+              <a:rPr lang="en-US" sz="1000" dirty="0">
+                <a:solidFill>
+                  <a:srgbClr val="8A93A8"/>
+                </a:solidFill>
+                <a:latin typeface="Meiryo" pitchFamily="34" charset="0"/>
+                <a:ea typeface="Meiryo" pitchFamily="34" charset="-122"/>
+                <a:cs typeface="Meiryo" pitchFamily="34" charset="-120"/>
+              </a:rPr>
+              <a:t>管理担当</a:t>
+            </a:r>
+            <a:endParaRPr lang="en-US" sz="1000" dirty="0"/>
+          </a:p>
+        </p:txBody>
+      </p:sp>
+      <p:sp>
+        <p:nvSpPr>
+          <p:cNvPr id="45" name="Text 43"/>
+          <p:cNvSpPr/>
+          <p:nvPr/>
+        </p:nvSpPr>
+        <p:spPr>
+          <a:xfrm>
+            <a:off x="9710928" y="3703320"/>
+            <a:ext cx="1453896" cy="1188720"/>
+          </a:xfrm>
+          <a:prstGeom prst="rect">
+            <a:avLst/>
+          </a:prstGeom>
+          <a:noFill/>
+          <a:ln/>
+        </p:spPr>
+        <p:txBody>
+          <a:bodyPr wrap="square" lIns="0" tIns="0" rIns="0" bIns="0" rtlCol="0" anchor="t"/>
+          <a:lstStyle/>
+          <a:p>
+            <a:pPr algn="ctr" indent="0" marL="0">
+              <a:lnSpc>
+                <a:spcPct val="105000"/>
+              </a:lnSpc>
+              <a:buNone/>
+            </a:pPr>
+            <a:r>
               <a:rPr lang="en-US" sz="1100" dirty="0">
                 <a:solidFill>
+                  <a:srgbClr val="6B7280"/>
+                </a:solidFill>
+                <a:latin typeface="Meiryo" pitchFamily="34" charset="0"/>
+                <a:ea typeface="Meiryo" pitchFamily="34" charset="-122"/>
+                <a:cs typeface="Meiryo" pitchFamily="34" charset="-120"/>
+              </a:rPr>
+              <a:t>納品して完了</a:t>
+            </a:r>
+            <a:endParaRPr lang="en-US" sz="1100" dirty="0"/>
+          </a:p>
+        </p:txBody>
+      </p:sp>
+      <p:sp>
+        <p:nvSpPr>
+          <p:cNvPr id="46" name="Shape 44"/>
+          <p:cNvSpPr/>
+          <p:nvPr/>
+        </p:nvSpPr>
+        <p:spPr>
+          <a:xfrm>
+            <a:off x="640080" y="5257800"/>
+            <a:ext cx="10881360" cy="960120"/>
+          </a:xfrm>
+          <a:prstGeom prst="roundRect">
+            <a:avLst>
+              <a:gd name="adj" fmla="val 7619"/>
+            </a:avLst>
+          </a:prstGeom>
+          <a:solidFill>
+            <a:srgbClr val="F4F8FF"/>
+          </a:solidFill>
+          <a:ln w="12700">
+            <a:solidFill>
+              <a:srgbClr val="D5E4FB"/>
+            </a:solidFill>
+            <a:prstDash val="solid"/>
+          </a:ln>
+        </p:spPr>
+      </p:sp>
+      <p:sp>
+        <p:nvSpPr>
+          <p:cNvPr id="47" name="Text 45"/>
+          <p:cNvSpPr/>
+          <p:nvPr/>
+        </p:nvSpPr>
+        <p:spPr>
+          <a:xfrm>
+            <a:off x="960120" y="5257800"/>
+            <a:ext cx="10241280" cy="960120"/>
+          </a:xfrm>
+          <a:prstGeom prst="rect">
+            <a:avLst/>
+          </a:prstGeom>
+          <a:noFill/>
+          <a:ln/>
+        </p:spPr>
+        <p:txBody>
+          <a:bodyPr wrap="square" lIns="0" tIns="0" rIns="0" bIns="0" rtlCol="0" anchor="ctr"/>
+          <a:lstStyle/>
+          <a:p>
+            <a:pPr indent="0" marL="0">
+              <a:buNone/>
+            </a:pPr>
+            <a:r>
+              <a:rPr lang="en-US" sz="1400" b="1" dirty="0">
+                <a:solidFill>
                   <a:srgbClr val="1E2761"/>
                 </a:solidFill>
                 <a:latin typeface="Meiryo" pitchFamily="34" charset="0"/>
                 <a:ea typeface="Meiryo" pitchFamily="34" charset="-122"/>
                 <a:cs typeface="Meiryo" pitchFamily="34" charset="-120"/>
               </a:rPr>
-              <a:t>管理</a:t>
-            </a:r>
-            <a:endParaRPr lang="en-US" sz="1100" dirty="0"/>
-          </a:p>
-        </p:txBody>
-      </p:sp>
-      <p:sp>
-        <p:nvSpPr>
-          <p:cNvPr id="38" name="Text 36"/>
-          <p:cNvSpPr/>
-          <p:nvPr/>
-        </p:nvSpPr>
-        <p:spPr>
-          <a:xfrm>
-            <a:off x="9710928" y="3520440"/>
-            <a:ext cx="1453896" cy="1645920"/>
-          </a:xfrm>
-          <a:prstGeom prst="rect">
-            <a:avLst/>
-          </a:prstGeom>
-          <a:noFill/>
-          <a:ln/>
-        </p:spPr>
-        <p:txBody>
-          <a:bodyPr wrap="square" lIns="0" tIns="0" rIns="0" bIns="0" rtlCol="0" anchor="t"/>
-          <a:lstStyle/>
-          <a:p>
-            <a:pPr algn="ctr" indent="0" marL="0">
-              <a:buNone/>
-            </a:pPr>
-            <a:r>
-              <a:rPr lang="en-US" sz="1250" dirty="0">
+              <a:t>「今どこ」＝ステータス</a:t>
+            </a:r>
+            <a:pPr indent="0" marL="0">
+              <a:buNone/>
+            </a:pPr>
+            <a:r>
+              <a:rPr lang="en-US" sz="1400" dirty="0">
                 <a:solidFill>
                   <a:srgbClr val="6B7280"/>
                 </a:solidFill>
@@ -11761,38 +12678,27 @@
                 <a:ea typeface="Meiryo" pitchFamily="34" charset="-122"/>
                 <a:cs typeface="Meiryo" pitchFamily="34" charset="-120"/>
               </a:rPr>
-              <a:t>確認して納品</a:t>
-            </a:r>
-            <a:endParaRPr lang="en-US" sz="1250" dirty="0"/>
-          </a:p>
-        </p:txBody>
-      </p:sp>
-      <p:sp>
-        <p:nvSpPr>
-          <p:cNvPr id="39" name="Text 37"/>
-          <p:cNvSpPr/>
-          <p:nvPr/>
-        </p:nvSpPr>
-        <p:spPr>
-          <a:xfrm>
-            <a:off x="640080" y="5943600"/>
-            <a:ext cx="10972800" cy="365760"/>
-          </a:xfrm>
-          <a:prstGeom prst="rect">
-            <a:avLst/>
-          </a:prstGeom>
-          <a:noFill/>
-          <a:ln/>
-        </p:spPr>
-        <p:txBody>
-          <a:bodyPr wrap="square" lIns="0" tIns="0" rIns="0" bIns="0" rtlCol="0" anchor="ctr"/>
-          <a:lstStyle/>
-          <a:p>
+              <a:t>　／　</a:t>
+            </a:r>
             <a:pPr indent="0" marL="0">
               <a:buNone/>
             </a:pPr>
             <a:r>
-              <a:rPr lang="en-US" sz="1200" i="1" dirty="0">
+              <a:rPr lang="en-US" sz="1400" b="1" dirty="0">
+                <a:solidFill>
+                  <a:srgbClr val="1E2761"/>
+                </a:solidFill>
+                <a:latin typeface="Meiryo" pitchFamily="34" charset="0"/>
+                <a:ea typeface="Meiryo" pitchFamily="34" charset="-122"/>
+                <a:cs typeface="Meiryo" pitchFamily="34" charset="-120"/>
+              </a:rPr>
+              <a:t>「次に進む条件」＝ナビ（P7）</a:t>
+            </a:r>
+            <a:pPr indent="0" marL="0">
+              <a:buNone/>
+            </a:pPr>
+            <a:r>
+              <a:rPr lang="en-US" sz="1400" dirty="0">
                 <a:solidFill>
                   <a:srgbClr val="6B7280"/>
                 </a:solidFill>
@@ -11800,9 +12706,37 @@
                 <a:ea typeface="Meiryo" pitchFamily="34" charset="-122"/>
                 <a:cs typeface="Meiryo" pitchFamily="34" charset="-120"/>
               </a:rPr>
-              <a:t>※ 画面・ボタンは日々改善中。今日は「流れ」で押さえてください。</a:t>
-            </a:r>
-            <a:endParaRPr lang="en-US" sz="1200" dirty="0"/>
+              <a:t>　／　</a:t>
+            </a:r>
+            <a:pPr indent="0" marL="0">
+              <a:buNone/>
+            </a:pPr>
+            <a:r>
+              <a:rPr lang="en-US" sz="1400" b="1" dirty="0">
+                <a:solidFill>
+                  <a:srgbClr val="1E2761"/>
+                </a:solidFill>
+                <a:latin typeface="Meiryo" pitchFamily="34" charset="0"/>
+                <a:ea typeface="Meiryo" pitchFamily="34" charset="-122"/>
+                <a:cs typeface="Meiryo" pitchFamily="34" charset="-120"/>
+              </a:rPr>
+              <a:t>「遅れ」＝アラート（P12）</a:t>
+            </a:r>
+            <a:pPr indent="0" marL="0">
+              <a:buNone/>
+            </a:pPr>
+            <a:r>
+              <a:rPr lang="en-US" sz="1400" dirty="0">
+                <a:solidFill>
+                  <a:srgbClr val="2A2E45"/>
+                </a:solidFill>
+                <a:latin typeface="Meiryo" pitchFamily="34" charset="0"/>
+                <a:ea typeface="Meiryo" pitchFamily="34" charset="-122"/>
+                <a:cs typeface="Meiryo" pitchFamily="34" charset="-120"/>
+              </a:rPr>
+              <a:t>　が、常に教えてくれる。</a:t>
+            </a:r>
+            <a:endParaRPr lang="en-US" sz="1400" dirty="0"/>
           </a:p>
         </p:txBody>
       </p:sp>

--- a/docs/新システム移行説明会_rev2.pptx
+++ b/docs/新システム移行説明会_rev2.pptx
@@ -11946,7 +11946,7 @@
                 <a:ea typeface="Meiryo" pitchFamily="34" charset="-122"/>
                 <a:cs typeface="Meiryo" pitchFamily="34" charset="-120"/>
               </a:rPr>
-              <a:t>対応中</a:t>
+              <a:t>作業進行中</a:t>
             </a:r>
             <a:endParaRPr lang="en-US" sz="1500" dirty="0"/>
           </a:p>
@@ -11985,7 +11985,7 @@
                 <a:ea typeface="Meiryo" pitchFamily="34" charset="-122"/>
                 <a:cs typeface="Meiryo" pitchFamily="34" charset="-120"/>
               </a:rPr>
-              <a:t>対応中</a:t>
+              <a:t>作業進行中</a:t>
             </a:r>
             <a:endParaRPr lang="en-US" sz="1050" dirty="0"/>
           </a:p>
